--- a/assets/figures-editable/appendix-studies/a-e03.pptx
+++ b/assets/figures-editable/appendix-studies/a-e03.pptx
@@ -7,7 +7,7 @@
   <p:sldIdLst>
     <p:sldId id="256" r:id="rId7"/>
   </p:sldIdLst>
-  <p:sldSz cx="8961120" cy="5870448" type="screen4x3"/>
+  <p:sldSz cx="12191695" cy="6858000" type="screen4x3"/>
   <p:notesSz cx="6858000" cy="9144000"/>
   <p:defaultTextStyle>
     <a:defPPr>
@@ -3098,14 +3098,14 @@
       <p:grpSpPr/>
       <p:sp>
         <p:nvSpPr>
-          <p:cNvPr id="2" name="text 0" descr="sci-ppt:obj-000"/>
+          <p:cNvPr id="2" name="A-E03 text 0" descr="sci-ppt:o000"/>
           <p:cNvSpPr txBox="1"/>
           <p:nvPr/>
         </p:nvSpPr>
         <p:spPr>
           <a:xfrm>
-            <a:off x="256032" y="137160"/>
-            <a:ext cx="7315200" cy="310896"/>
+            <a:off x="274320" y="118872"/>
+            <a:ext cx="11612880" cy="340105"/>
           </a:xfrm>
           <a:prstGeom prst="rect">
             <a:avLst/>
@@ -3114,7 +3114,7 @@
           <a:effectLst/>
         </p:spPr>
         <p:txBody>
-          <a:bodyPr wrap="none" lIns="0" rIns="0" tIns="0" bIns="0" anchor="ctr">
+          <a:bodyPr wrap="none" lIns="18288" rIns="18288" tIns="18288" bIns="18288" anchor="t">
             <a:spAutoFit/>
           </a:bodyPr>
           <a:lstStyle/>
@@ -3125,39 +3125,2240 @@
               </a:spcAft>
             </a:pPr>
             <a:r>
-              <a:rPr sz="1439" b="0" i="0">
+              <a:rPr sz="1900" b="1" i="0">
                 <a:solidFill>
                   <a:srgbClr val="8EDBD4"/>
                 </a:solidFill>
                 <a:latin typeface="Arial"/>
               </a:rPr>
-              <a:t>A-E03 · Physical variable map</a:t>
-            </a:r>
-          </a:p>
-        </p:txBody>
-      </p:sp>
-      <p:sp>
-        <p:nvSpPr>
-          <p:cNvPr id="3" name="ellipse 1" descr="sci-ppt:obj-001"/>
-          <p:cNvSpPr/>
+              <a:t>A-E03 · Static balance defining the elastic resistance</a:t>
+            </a:r>
+          </a:p>
+        </p:txBody>
+      </p:sp>
+      <p:cxnSp>
+        <p:nvCxnSpPr>
+          <p:cNvPr id="3" name="A-E03 line 1" descr="sci-ppt:o001"/>
+          <p:cNvCxnSpPr/>
           <p:nvPr/>
-        </p:nvSpPr>
-        <p:spPr>
-          <a:xfrm>
-            <a:off x="1060704" y="914400"/>
-            <a:ext cx="1463040" cy="1463040"/>
-          </a:xfrm>
-          <a:prstGeom prst="ellipse">
+        </p:nvCxnSpPr>
+        <p:spPr>
+          <a:xfrm>
+            <a:off x="914400" y="5029200"/>
+            <a:ext cx="5852160" cy="0"/>
+          </a:xfrm>
+          <a:prstGeom prst="line">
             <a:avLst/>
           </a:prstGeom>
-          <a:noFill/>
-          <a:ln w="17780">
+          <a:ln w="19050">
             <a:solidFill>
               <a:srgbClr val="B4C7D2"/>
             </a:solidFill>
           </a:ln>
           <a:effectLst/>
         </p:spPr>
+      </p:cxnSp>
+      <p:cxnSp>
+        <p:nvCxnSpPr>
+          <p:cNvPr id="4" name="A-E03 line 2" descr="sci-ppt:o002"/>
+          <p:cNvCxnSpPr/>
+          <p:nvPr/>
+        </p:nvCxnSpPr>
+        <p:spPr>
+          <a:xfrm>
+            <a:off x="914400" y="1371600"/>
+            <a:ext cx="0" cy="3657600"/>
+          </a:xfrm>
+          <a:prstGeom prst="line">
+            <a:avLst/>
+          </a:prstGeom>
+          <a:ln w="19050">
+            <a:solidFill>
+              <a:srgbClr val="B4C7D2"/>
+            </a:solidFill>
+          </a:ln>
+          <a:effectLst/>
+        </p:spPr>
+      </p:cxnSp>
+      <p:cxnSp>
+        <p:nvCxnSpPr>
+          <p:cNvPr id="5" name="A-E03 line 3" descr="sci-ppt:o003"/>
+          <p:cNvCxnSpPr/>
+          <p:nvPr/>
+        </p:nvCxnSpPr>
+        <p:spPr>
+          <a:xfrm>
+            <a:off x="914400" y="5029200"/>
+            <a:ext cx="0" cy="64008"/>
+          </a:xfrm>
+          <a:prstGeom prst="line">
+            <a:avLst/>
+          </a:prstGeom>
+          <a:ln w="12700">
+            <a:solidFill>
+              <a:srgbClr val="B4C7D2"/>
+            </a:solidFill>
+          </a:ln>
+          <a:effectLst/>
+        </p:spPr>
+      </p:cxnSp>
+      <p:cxnSp>
+        <p:nvCxnSpPr>
+          <p:cNvPr id="6" name="A-E03 line 4" descr="sci-ppt:o004"/>
+          <p:cNvCxnSpPr/>
+          <p:nvPr/>
+        </p:nvCxnSpPr>
+        <p:spPr>
+          <a:xfrm>
+            <a:off x="914400" y="1371600"/>
+            <a:ext cx="0" cy="3657600"/>
+          </a:xfrm>
+          <a:prstGeom prst="line">
+            <a:avLst/>
+          </a:prstGeom>
+          <a:ln w="7620">
+            <a:solidFill>
+              <a:srgbClr val="2E4756"/>
+            </a:solidFill>
+          </a:ln>
+          <a:effectLst/>
+        </p:spPr>
+      </p:cxnSp>
+      <p:sp>
+        <p:nvSpPr>
+          <p:cNvPr id="7" name="A-E03 text 5" descr="sci-ppt:o005"/>
+          <p:cNvSpPr txBox="1"/>
+          <p:nvPr/>
+        </p:nvSpPr>
+        <p:spPr>
+          <a:xfrm>
+            <a:off x="457200" y="5111496"/>
+            <a:ext cx="914400" cy="208407"/>
+          </a:xfrm>
+          <a:prstGeom prst="rect">
+            <a:avLst/>
+          </a:prstGeom>
+          <a:noFill/>
+          <a:effectLst/>
+        </p:spPr>
+        <p:txBody>
+          <a:bodyPr wrap="none" lIns="18288" rIns="18288" tIns="18288" bIns="18288" anchor="t">
+            <a:spAutoFit/>
+          </a:bodyPr>
+          <a:lstStyle/>
+          <a:p>
+            <a:pPr algn="ctr">
+              <a:spcAft>
+                <a:spcPts val="0"/>
+              </a:spcAft>
+            </a:pPr>
+            <a:r>
+              <a:rPr sz="1050" b="0" i="0">
+                <a:solidFill>
+                  <a:srgbClr val="B4C7D2"/>
+                </a:solidFill>
+                <a:latin typeface="Arial"/>
+              </a:rPr>
+              <a:t>1</a:t>
+            </a:r>
+          </a:p>
+        </p:txBody>
+      </p:sp>
+      <p:cxnSp>
+        <p:nvCxnSpPr>
+          <p:cNvPr id="8" name="A-E03 line 6" descr="sci-ppt:o006"/>
+          <p:cNvCxnSpPr/>
+          <p:nvPr/>
+        </p:nvCxnSpPr>
+        <p:spPr>
+          <a:xfrm>
+            <a:off x="2084832" y="5029200"/>
+            <a:ext cx="0" cy="64008"/>
+          </a:xfrm>
+          <a:prstGeom prst="line">
+            <a:avLst/>
+          </a:prstGeom>
+          <a:ln w="12700">
+            <a:solidFill>
+              <a:srgbClr val="B4C7D2"/>
+            </a:solidFill>
+          </a:ln>
+          <a:effectLst/>
+        </p:spPr>
+      </p:cxnSp>
+      <p:cxnSp>
+        <p:nvCxnSpPr>
+          <p:cNvPr id="9" name="A-E03 line 7" descr="sci-ppt:o007"/>
+          <p:cNvCxnSpPr/>
+          <p:nvPr/>
+        </p:nvCxnSpPr>
+        <p:spPr>
+          <a:xfrm>
+            <a:off x="2084832" y="1371600"/>
+            <a:ext cx="0" cy="3657600"/>
+          </a:xfrm>
+          <a:prstGeom prst="line">
+            <a:avLst/>
+          </a:prstGeom>
+          <a:ln w="7620">
+            <a:solidFill>
+              <a:srgbClr val="2E4756"/>
+            </a:solidFill>
+          </a:ln>
+          <a:effectLst/>
+        </p:spPr>
+      </p:cxnSp>
+      <p:sp>
+        <p:nvSpPr>
+          <p:cNvPr id="10" name="A-E03 text 8" descr="sci-ppt:o008"/>
+          <p:cNvSpPr txBox="1"/>
+          <p:nvPr/>
+        </p:nvSpPr>
+        <p:spPr>
+          <a:xfrm>
+            <a:off x="1627632" y="5111496"/>
+            <a:ext cx="914400" cy="208407"/>
+          </a:xfrm>
+          <a:prstGeom prst="rect">
+            <a:avLst/>
+          </a:prstGeom>
+          <a:noFill/>
+          <a:effectLst/>
+        </p:spPr>
+        <p:txBody>
+          <a:bodyPr wrap="none" lIns="18288" rIns="18288" tIns="18288" bIns="18288" anchor="t">
+            <a:spAutoFit/>
+          </a:bodyPr>
+          <a:lstStyle/>
+          <a:p>
+            <a:pPr algn="ctr">
+              <a:spcAft>
+                <a:spcPts val="0"/>
+              </a:spcAft>
+            </a:pPr>
+            <a:r>
+              <a:rPr sz="1050" b="0" i="0">
+                <a:solidFill>
+                  <a:srgbClr val="B4C7D2"/>
+                </a:solidFill>
+                <a:latin typeface="Arial"/>
+              </a:rPr>
+              <a:t>2</a:t>
+            </a:r>
+          </a:p>
+        </p:txBody>
+      </p:sp>
+      <p:cxnSp>
+        <p:nvCxnSpPr>
+          <p:cNvPr id="11" name="A-E03 line 9" descr="sci-ppt:o009"/>
+          <p:cNvCxnSpPr/>
+          <p:nvPr/>
+        </p:nvCxnSpPr>
+        <p:spPr>
+          <a:xfrm>
+            <a:off x="3255264" y="5029200"/>
+            <a:ext cx="0" cy="64008"/>
+          </a:xfrm>
+          <a:prstGeom prst="line">
+            <a:avLst/>
+          </a:prstGeom>
+          <a:ln w="12700">
+            <a:solidFill>
+              <a:srgbClr val="B4C7D2"/>
+            </a:solidFill>
+          </a:ln>
+          <a:effectLst/>
+        </p:spPr>
+      </p:cxnSp>
+      <p:cxnSp>
+        <p:nvCxnSpPr>
+          <p:cNvPr id="12" name="A-E03 line 10" descr="sci-ppt:o010"/>
+          <p:cNvCxnSpPr/>
+          <p:nvPr/>
+        </p:nvCxnSpPr>
+        <p:spPr>
+          <a:xfrm>
+            <a:off x="3255264" y="1371600"/>
+            <a:ext cx="0" cy="3657600"/>
+          </a:xfrm>
+          <a:prstGeom prst="line">
+            <a:avLst/>
+          </a:prstGeom>
+          <a:ln w="7620">
+            <a:solidFill>
+              <a:srgbClr val="2E4756"/>
+            </a:solidFill>
+          </a:ln>
+          <a:effectLst/>
+        </p:spPr>
+      </p:cxnSp>
+      <p:sp>
+        <p:nvSpPr>
+          <p:cNvPr id="13" name="A-E03 text 11" descr="sci-ppt:o011"/>
+          <p:cNvSpPr txBox="1"/>
+          <p:nvPr/>
+        </p:nvSpPr>
+        <p:spPr>
+          <a:xfrm>
+            <a:off x="2798064" y="5111496"/>
+            <a:ext cx="914400" cy="208407"/>
+          </a:xfrm>
+          <a:prstGeom prst="rect">
+            <a:avLst/>
+          </a:prstGeom>
+          <a:noFill/>
+          <a:effectLst/>
+        </p:spPr>
+        <p:txBody>
+          <a:bodyPr wrap="none" lIns="18288" rIns="18288" tIns="18288" bIns="18288" anchor="t">
+            <a:spAutoFit/>
+          </a:bodyPr>
+          <a:lstStyle/>
+          <a:p>
+            <a:pPr algn="ctr">
+              <a:spcAft>
+                <a:spcPts val="0"/>
+              </a:spcAft>
+            </a:pPr>
+            <a:r>
+              <a:rPr sz="1050" b="0" i="0">
+                <a:solidFill>
+                  <a:srgbClr val="B4C7D2"/>
+                </a:solidFill>
+                <a:latin typeface="Arial"/>
+              </a:rPr>
+              <a:t>3</a:t>
+            </a:r>
+          </a:p>
+        </p:txBody>
+      </p:sp>
+      <p:cxnSp>
+        <p:nvCxnSpPr>
+          <p:cNvPr id="14" name="A-E03 line 12" descr="sci-ppt:o012"/>
+          <p:cNvCxnSpPr/>
+          <p:nvPr/>
+        </p:nvCxnSpPr>
+        <p:spPr>
+          <a:xfrm>
+            <a:off x="4425696" y="5029200"/>
+            <a:ext cx="0" cy="64008"/>
+          </a:xfrm>
+          <a:prstGeom prst="line">
+            <a:avLst/>
+          </a:prstGeom>
+          <a:ln w="12700">
+            <a:solidFill>
+              <a:srgbClr val="B4C7D2"/>
+            </a:solidFill>
+          </a:ln>
+          <a:effectLst/>
+        </p:spPr>
+      </p:cxnSp>
+      <p:cxnSp>
+        <p:nvCxnSpPr>
+          <p:cNvPr id="15" name="A-E03 line 13" descr="sci-ppt:o013"/>
+          <p:cNvCxnSpPr/>
+          <p:nvPr/>
+        </p:nvCxnSpPr>
+        <p:spPr>
+          <a:xfrm>
+            <a:off x="4425696" y="1371600"/>
+            <a:ext cx="0" cy="3657600"/>
+          </a:xfrm>
+          <a:prstGeom prst="line">
+            <a:avLst/>
+          </a:prstGeom>
+          <a:ln w="7620">
+            <a:solidFill>
+              <a:srgbClr val="2E4756"/>
+            </a:solidFill>
+          </a:ln>
+          <a:effectLst/>
+        </p:spPr>
+      </p:cxnSp>
+      <p:sp>
+        <p:nvSpPr>
+          <p:cNvPr id="16" name="A-E03 text 14" descr="sci-ppt:o014"/>
+          <p:cNvSpPr txBox="1"/>
+          <p:nvPr/>
+        </p:nvSpPr>
+        <p:spPr>
+          <a:xfrm>
+            <a:off x="3968496" y="5111496"/>
+            <a:ext cx="914400" cy="208407"/>
+          </a:xfrm>
+          <a:prstGeom prst="rect">
+            <a:avLst/>
+          </a:prstGeom>
+          <a:noFill/>
+          <a:effectLst/>
+        </p:spPr>
+        <p:txBody>
+          <a:bodyPr wrap="none" lIns="18288" rIns="18288" tIns="18288" bIns="18288" anchor="t">
+            <a:spAutoFit/>
+          </a:bodyPr>
+          <a:lstStyle/>
+          <a:p>
+            <a:pPr algn="ctr">
+              <a:spcAft>
+                <a:spcPts val="0"/>
+              </a:spcAft>
+            </a:pPr>
+            <a:r>
+              <a:rPr sz="1050" b="0" i="0">
+                <a:solidFill>
+                  <a:srgbClr val="B4C7D2"/>
+                </a:solidFill>
+                <a:latin typeface="Arial"/>
+              </a:rPr>
+              <a:t>4</a:t>
+            </a:r>
+          </a:p>
+        </p:txBody>
+      </p:sp>
+      <p:cxnSp>
+        <p:nvCxnSpPr>
+          <p:cNvPr id="17" name="A-E03 line 15" descr="sci-ppt:o015"/>
+          <p:cNvCxnSpPr/>
+          <p:nvPr/>
+        </p:nvCxnSpPr>
+        <p:spPr>
+          <a:xfrm>
+            <a:off x="5596128" y="5029200"/>
+            <a:ext cx="0" cy="64008"/>
+          </a:xfrm>
+          <a:prstGeom prst="line">
+            <a:avLst/>
+          </a:prstGeom>
+          <a:ln w="12700">
+            <a:solidFill>
+              <a:srgbClr val="B4C7D2"/>
+            </a:solidFill>
+          </a:ln>
+          <a:effectLst/>
+        </p:spPr>
+      </p:cxnSp>
+      <p:cxnSp>
+        <p:nvCxnSpPr>
+          <p:cNvPr id="18" name="A-E03 line 16" descr="sci-ppt:o016"/>
+          <p:cNvCxnSpPr/>
+          <p:nvPr/>
+        </p:nvCxnSpPr>
+        <p:spPr>
+          <a:xfrm>
+            <a:off x="5596128" y="1371600"/>
+            <a:ext cx="0" cy="3657600"/>
+          </a:xfrm>
+          <a:prstGeom prst="line">
+            <a:avLst/>
+          </a:prstGeom>
+          <a:ln w="7620">
+            <a:solidFill>
+              <a:srgbClr val="2E4756"/>
+            </a:solidFill>
+          </a:ln>
+          <a:effectLst/>
+        </p:spPr>
+      </p:cxnSp>
+      <p:sp>
+        <p:nvSpPr>
+          <p:cNvPr id="19" name="A-E03 text 17" descr="sci-ppt:o017"/>
+          <p:cNvSpPr txBox="1"/>
+          <p:nvPr/>
+        </p:nvSpPr>
+        <p:spPr>
+          <a:xfrm>
+            <a:off x="5138928" y="5111496"/>
+            <a:ext cx="914400" cy="208407"/>
+          </a:xfrm>
+          <a:prstGeom prst="rect">
+            <a:avLst/>
+          </a:prstGeom>
+          <a:noFill/>
+          <a:effectLst/>
+        </p:spPr>
+        <p:txBody>
+          <a:bodyPr wrap="none" lIns="18288" rIns="18288" tIns="18288" bIns="18288" anchor="t">
+            <a:spAutoFit/>
+          </a:bodyPr>
+          <a:lstStyle/>
+          <a:p>
+            <a:pPr algn="ctr">
+              <a:spcAft>
+                <a:spcPts val="0"/>
+              </a:spcAft>
+            </a:pPr>
+            <a:r>
+              <a:rPr sz="1050" b="0" i="0">
+                <a:solidFill>
+                  <a:srgbClr val="B4C7D2"/>
+                </a:solidFill>
+                <a:latin typeface="Arial"/>
+              </a:rPr>
+              <a:t>5</a:t>
+            </a:r>
+          </a:p>
+        </p:txBody>
+      </p:sp>
+      <p:cxnSp>
+        <p:nvCxnSpPr>
+          <p:cNvPr id="20" name="A-E03 line 18" descr="sci-ppt:o018"/>
+          <p:cNvCxnSpPr/>
+          <p:nvPr/>
+        </p:nvCxnSpPr>
+        <p:spPr>
+          <a:xfrm>
+            <a:off x="6766560" y="5029200"/>
+            <a:ext cx="0" cy="64008"/>
+          </a:xfrm>
+          <a:prstGeom prst="line">
+            <a:avLst/>
+          </a:prstGeom>
+          <a:ln w="12700">
+            <a:solidFill>
+              <a:srgbClr val="B4C7D2"/>
+            </a:solidFill>
+          </a:ln>
+          <a:effectLst/>
+        </p:spPr>
+      </p:cxnSp>
+      <p:cxnSp>
+        <p:nvCxnSpPr>
+          <p:cNvPr id="21" name="A-E03 line 19" descr="sci-ppt:o019"/>
+          <p:cNvCxnSpPr/>
+          <p:nvPr/>
+        </p:nvCxnSpPr>
+        <p:spPr>
+          <a:xfrm>
+            <a:off x="6766560" y="1371600"/>
+            <a:ext cx="0" cy="3657600"/>
+          </a:xfrm>
+          <a:prstGeom prst="line">
+            <a:avLst/>
+          </a:prstGeom>
+          <a:ln w="7620">
+            <a:solidFill>
+              <a:srgbClr val="2E4756"/>
+            </a:solidFill>
+          </a:ln>
+          <a:effectLst/>
+        </p:spPr>
+      </p:cxnSp>
+      <p:sp>
+        <p:nvSpPr>
+          <p:cNvPr id="22" name="A-E03 text 20" descr="sci-ppt:o020"/>
+          <p:cNvSpPr txBox="1"/>
+          <p:nvPr/>
+        </p:nvSpPr>
+        <p:spPr>
+          <a:xfrm>
+            <a:off x="6309360" y="5111496"/>
+            <a:ext cx="914400" cy="208407"/>
+          </a:xfrm>
+          <a:prstGeom prst="rect">
+            <a:avLst/>
+          </a:prstGeom>
+          <a:noFill/>
+          <a:effectLst/>
+        </p:spPr>
+        <p:txBody>
+          <a:bodyPr wrap="none" lIns="18288" rIns="18288" tIns="18288" bIns="18288" anchor="t">
+            <a:spAutoFit/>
+          </a:bodyPr>
+          <a:lstStyle/>
+          <a:p>
+            <a:pPr algn="ctr">
+              <a:spcAft>
+                <a:spcPts val="0"/>
+              </a:spcAft>
+            </a:pPr>
+            <a:r>
+              <a:rPr sz="1050" b="0" i="0">
+                <a:solidFill>
+                  <a:srgbClr val="B4C7D2"/>
+                </a:solidFill>
+                <a:latin typeface="Arial"/>
+              </a:rPr>
+              <a:t>6</a:t>
+            </a:r>
+          </a:p>
+        </p:txBody>
+      </p:sp>
+      <p:cxnSp>
+        <p:nvCxnSpPr>
+          <p:cNvPr id="23" name="A-E03 line 21" descr="sci-ppt:o021"/>
+          <p:cNvCxnSpPr/>
+          <p:nvPr/>
+        </p:nvCxnSpPr>
+        <p:spPr>
+          <a:xfrm>
+            <a:off x="850392" y="5029200"/>
+            <a:ext cx="64008" cy="0"/>
+          </a:xfrm>
+          <a:prstGeom prst="line">
+            <a:avLst/>
+          </a:prstGeom>
+          <a:ln w="12700">
+            <a:solidFill>
+              <a:srgbClr val="B4C7D2"/>
+            </a:solidFill>
+          </a:ln>
+          <a:effectLst/>
+        </p:spPr>
+      </p:cxnSp>
+      <p:cxnSp>
+        <p:nvCxnSpPr>
+          <p:cNvPr id="24" name="A-E03 line 22" descr="sci-ppt:o022"/>
+          <p:cNvCxnSpPr/>
+          <p:nvPr/>
+        </p:nvCxnSpPr>
+        <p:spPr>
+          <a:xfrm>
+            <a:off x="850392" y="4263715"/>
+            <a:ext cx="64008" cy="0"/>
+          </a:xfrm>
+          <a:prstGeom prst="line">
+            <a:avLst/>
+          </a:prstGeom>
+          <a:ln w="12700">
+            <a:solidFill>
+              <a:srgbClr val="B4C7D2"/>
+            </a:solidFill>
+          </a:ln>
+          <a:effectLst/>
+        </p:spPr>
+      </p:cxnSp>
+      <p:cxnSp>
+        <p:nvCxnSpPr>
+          <p:cNvPr id="25" name="A-E03 line 23" descr="sci-ppt:o023"/>
+          <p:cNvCxnSpPr/>
+          <p:nvPr/>
+        </p:nvCxnSpPr>
+        <p:spPr>
+          <a:xfrm>
+            <a:off x="914400" y="4263715"/>
+            <a:ext cx="5852160" cy="0"/>
+          </a:xfrm>
+          <a:prstGeom prst="line">
+            <a:avLst/>
+          </a:prstGeom>
+          <a:ln w="7620">
+            <a:solidFill>
+              <a:srgbClr val="2E4756"/>
+            </a:solidFill>
+          </a:ln>
+          <a:effectLst/>
+        </p:spPr>
+      </p:cxnSp>
+      <p:sp>
+        <p:nvSpPr>
+          <p:cNvPr id="26" name="A-E03 text 24" descr="sci-ppt:o024"/>
+          <p:cNvSpPr txBox="1"/>
+          <p:nvPr/>
+        </p:nvSpPr>
+        <p:spPr>
+          <a:xfrm>
+            <a:off x="45720" y="4181419"/>
+            <a:ext cx="777240" cy="208407"/>
+          </a:xfrm>
+          <a:prstGeom prst="rect">
+            <a:avLst/>
+          </a:prstGeom>
+          <a:noFill/>
+          <a:effectLst/>
+        </p:spPr>
+        <p:txBody>
+          <a:bodyPr wrap="none" lIns="18288" rIns="18288" tIns="18288" bIns="18288" anchor="t">
+            <a:spAutoFit/>
+          </a:bodyPr>
+          <a:lstStyle/>
+          <a:p>
+            <a:pPr algn="r">
+              <a:spcAft>
+                <a:spcPts val="0"/>
+              </a:spcAft>
+            </a:pPr>
+            <a:r>
+              <a:rPr sz="1050" b="0" i="0">
+                <a:solidFill>
+                  <a:srgbClr val="B4C7D2"/>
+                </a:solidFill>
+                <a:latin typeface="Arial"/>
+              </a:rPr>
+              <a:t>0.01</a:t>
+            </a:r>
+          </a:p>
+        </p:txBody>
+      </p:sp>
+      <p:cxnSp>
+        <p:nvCxnSpPr>
+          <p:cNvPr id="27" name="A-E03 line 25" descr="sci-ppt:o025"/>
+          <p:cNvCxnSpPr/>
+          <p:nvPr/>
+        </p:nvCxnSpPr>
+        <p:spPr>
+          <a:xfrm>
+            <a:off x="850392" y="3498231"/>
+            <a:ext cx="64008" cy="0"/>
+          </a:xfrm>
+          <a:prstGeom prst="line">
+            <a:avLst/>
+          </a:prstGeom>
+          <a:ln w="12700">
+            <a:solidFill>
+              <a:srgbClr val="B4C7D2"/>
+            </a:solidFill>
+          </a:ln>
+          <a:effectLst/>
+        </p:spPr>
+      </p:cxnSp>
+      <p:cxnSp>
+        <p:nvCxnSpPr>
+          <p:cNvPr id="28" name="A-E03 line 26" descr="sci-ppt:o026"/>
+          <p:cNvCxnSpPr/>
+          <p:nvPr/>
+        </p:nvCxnSpPr>
+        <p:spPr>
+          <a:xfrm>
+            <a:off x="914400" y="3498231"/>
+            <a:ext cx="5852160" cy="0"/>
+          </a:xfrm>
+          <a:prstGeom prst="line">
+            <a:avLst/>
+          </a:prstGeom>
+          <a:ln w="7620">
+            <a:solidFill>
+              <a:srgbClr val="2E4756"/>
+            </a:solidFill>
+          </a:ln>
+          <a:effectLst/>
+        </p:spPr>
+      </p:cxnSp>
+      <p:sp>
+        <p:nvSpPr>
+          <p:cNvPr id="29" name="A-E03 text 27" descr="sci-ppt:o027"/>
+          <p:cNvSpPr txBox="1"/>
+          <p:nvPr/>
+        </p:nvSpPr>
+        <p:spPr>
+          <a:xfrm>
+            <a:off x="45720" y="3415935"/>
+            <a:ext cx="777240" cy="208407"/>
+          </a:xfrm>
+          <a:prstGeom prst="rect">
+            <a:avLst/>
+          </a:prstGeom>
+          <a:noFill/>
+          <a:effectLst/>
+        </p:spPr>
+        <p:txBody>
+          <a:bodyPr wrap="none" lIns="18288" rIns="18288" tIns="18288" bIns="18288" anchor="t">
+            <a:spAutoFit/>
+          </a:bodyPr>
+          <a:lstStyle/>
+          <a:p>
+            <a:pPr algn="r">
+              <a:spcAft>
+                <a:spcPts val="0"/>
+              </a:spcAft>
+            </a:pPr>
+            <a:r>
+              <a:rPr sz="1050" b="0" i="0">
+                <a:solidFill>
+                  <a:srgbClr val="B4C7D2"/>
+                </a:solidFill>
+                <a:latin typeface="Arial"/>
+              </a:rPr>
+              <a:t>0.1</a:t>
+            </a:r>
+          </a:p>
+        </p:txBody>
+      </p:sp>
+      <p:cxnSp>
+        <p:nvCxnSpPr>
+          <p:cNvPr id="30" name="A-E03 line 28" descr="sci-ppt:o028"/>
+          <p:cNvCxnSpPr/>
+          <p:nvPr/>
+        </p:nvCxnSpPr>
+        <p:spPr>
+          <a:xfrm>
+            <a:off x="850392" y="2732746"/>
+            <a:ext cx="64008" cy="0"/>
+          </a:xfrm>
+          <a:prstGeom prst="line">
+            <a:avLst/>
+          </a:prstGeom>
+          <a:ln w="12700">
+            <a:solidFill>
+              <a:srgbClr val="B4C7D2"/>
+            </a:solidFill>
+          </a:ln>
+          <a:effectLst/>
+        </p:spPr>
+      </p:cxnSp>
+      <p:cxnSp>
+        <p:nvCxnSpPr>
+          <p:cNvPr id="31" name="A-E03 line 29" descr="sci-ppt:o029"/>
+          <p:cNvCxnSpPr/>
+          <p:nvPr/>
+        </p:nvCxnSpPr>
+        <p:spPr>
+          <a:xfrm>
+            <a:off x="914400" y="2732746"/>
+            <a:ext cx="5852160" cy="0"/>
+          </a:xfrm>
+          <a:prstGeom prst="line">
+            <a:avLst/>
+          </a:prstGeom>
+          <a:ln w="7620">
+            <a:solidFill>
+              <a:srgbClr val="2E4756"/>
+            </a:solidFill>
+          </a:ln>
+          <a:effectLst/>
+        </p:spPr>
+      </p:cxnSp>
+      <p:sp>
+        <p:nvSpPr>
+          <p:cNvPr id="32" name="A-E03 text 30" descr="sci-ppt:o030"/>
+          <p:cNvSpPr txBox="1"/>
+          <p:nvPr/>
+        </p:nvSpPr>
+        <p:spPr>
+          <a:xfrm>
+            <a:off x="45720" y="2650450"/>
+            <a:ext cx="777240" cy="208407"/>
+          </a:xfrm>
+          <a:prstGeom prst="rect">
+            <a:avLst/>
+          </a:prstGeom>
+          <a:noFill/>
+          <a:effectLst/>
+        </p:spPr>
+        <p:txBody>
+          <a:bodyPr wrap="none" lIns="18288" rIns="18288" tIns="18288" bIns="18288" anchor="t">
+            <a:spAutoFit/>
+          </a:bodyPr>
+          <a:lstStyle/>
+          <a:p>
+            <a:pPr algn="r">
+              <a:spcAft>
+                <a:spcPts val="0"/>
+              </a:spcAft>
+            </a:pPr>
+            <a:r>
+              <a:rPr sz="1050" b="0" i="0">
+                <a:solidFill>
+                  <a:srgbClr val="B4C7D2"/>
+                </a:solidFill>
+                <a:latin typeface="Arial"/>
+              </a:rPr>
+              <a:t>1</a:t>
+            </a:r>
+          </a:p>
+        </p:txBody>
+      </p:sp>
+      <p:cxnSp>
+        <p:nvCxnSpPr>
+          <p:cNvPr id="33" name="A-E03 line 31" descr="sci-ppt:o031"/>
+          <p:cNvCxnSpPr/>
+          <p:nvPr/>
+        </p:nvCxnSpPr>
+        <p:spPr>
+          <a:xfrm>
+            <a:off x="850392" y="1967262"/>
+            <a:ext cx="64008" cy="0"/>
+          </a:xfrm>
+          <a:prstGeom prst="line">
+            <a:avLst/>
+          </a:prstGeom>
+          <a:ln w="12700">
+            <a:solidFill>
+              <a:srgbClr val="B4C7D2"/>
+            </a:solidFill>
+          </a:ln>
+          <a:effectLst/>
+        </p:spPr>
+      </p:cxnSp>
+      <p:cxnSp>
+        <p:nvCxnSpPr>
+          <p:cNvPr id="34" name="A-E03 line 32" descr="sci-ppt:o032"/>
+          <p:cNvCxnSpPr/>
+          <p:nvPr/>
+        </p:nvCxnSpPr>
+        <p:spPr>
+          <a:xfrm>
+            <a:off x="914400" y="1967262"/>
+            <a:ext cx="5852160" cy="0"/>
+          </a:xfrm>
+          <a:prstGeom prst="line">
+            <a:avLst/>
+          </a:prstGeom>
+          <a:ln w="7620">
+            <a:solidFill>
+              <a:srgbClr val="2E4756"/>
+            </a:solidFill>
+          </a:ln>
+          <a:effectLst/>
+        </p:spPr>
+      </p:cxnSp>
+      <p:sp>
+        <p:nvSpPr>
+          <p:cNvPr id="35" name="A-E03 text 33" descr="sci-ppt:o033"/>
+          <p:cNvSpPr txBox="1"/>
+          <p:nvPr/>
+        </p:nvSpPr>
+        <p:spPr>
+          <a:xfrm>
+            <a:off x="45720" y="1884966"/>
+            <a:ext cx="777240" cy="208407"/>
+          </a:xfrm>
+          <a:prstGeom prst="rect">
+            <a:avLst/>
+          </a:prstGeom>
+          <a:noFill/>
+          <a:effectLst/>
+        </p:spPr>
+        <p:txBody>
+          <a:bodyPr wrap="none" lIns="18288" rIns="18288" tIns="18288" bIns="18288" anchor="t">
+            <a:spAutoFit/>
+          </a:bodyPr>
+          <a:lstStyle/>
+          <a:p>
+            <a:pPr algn="r">
+              <a:spcAft>
+                <a:spcPts val="0"/>
+              </a:spcAft>
+            </a:pPr>
+            <a:r>
+              <a:rPr sz="1050" b="0" i="0">
+                <a:solidFill>
+                  <a:srgbClr val="B4C7D2"/>
+                </a:solidFill>
+                <a:latin typeface="Arial"/>
+              </a:rPr>
+              <a:t>10</a:t>
+            </a:r>
+          </a:p>
+        </p:txBody>
+      </p:sp>
+      <p:sp>
+        <p:nvSpPr>
+          <p:cNvPr id="36" name="A-E03 text 34" descr="sci-ppt:o034"/>
+          <p:cNvSpPr txBox="1"/>
+          <p:nvPr/>
+        </p:nvSpPr>
+        <p:spPr>
+          <a:xfrm>
+            <a:off x="914400" y="5312664"/>
+            <a:ext cx="5852160" cy="231648"/>
+          </a:xfrm>
+          <a:prstGeom prst="rect">
+            <a:avLst/>
+          </a:prstGeom>
+          <a:noFill/>
+          <a:effectLst/>
+        </p:spPr>
+        <p:txBody>
+          <a:bodyPr wrap="none" lIns="18288" rIns="18288" tIns="18288" bIns="18288" anchor="t">
+            <a:spAutoFit/>
+          </a:bodyPr>
+          <a:lstStyle/>
+          <a:p>
+            <a:pPr algn="ctr">
+              <a:spcAft>
+                <a:spcPts val="0"/>
+              </a:spcAft>
+            </a:pPr>
+            <a:r>
+              <a:rPr sz="1200" b="0" i="0">
+                <a:solidFill>
+                  <a:srgbClr val="E7F0F3"/>
+                </a:solidFill>
+                <a:latin typeface="Arial"/>
+              </a:rPr>
+              <a:t>r / R</a:t>
+            </a:r>
+          </a:p>
+        </p:txBody>
+      </p:sp>
+      <p:sp>
+        <p:nvSpPr>
+          <p:cNvPr id="37" name="A-E03 text 35" descr="sci-ppt:o035"/>
+          <p:cNvSpPr txBox="1"/>
+          <p:nvPr/>
+        </p:nvSpPr>
+        <p:spPr>
+          <a:xfrm>
+            <a:off x="365760" y="1024128"/>
+            <a:ext cx="5852160" cy="231648"/>
+          </a:xfrm>
+          <a:prstGeom prst="rect">
+            <a:avLst/>
+          </a:prstGeom>
+          <a:noFill/>
+          <a:effectLst/>
+        </p:spPr>
+        <p:txBody>
+          <a:bodyPr wrap="none" lIns="18288" rIns="18288" tIns="18288" bIns="18288" anchor="t">
+            <a:spAutoFit/>
+          </a:bodyPr>
+          <a:lstStyle/>
+          <a:p>
+            <a:pPr algn="l">
+              <a:spcAft>
+                <a:spcPts val="0"/>
+              </a:spcAft>
+            </a:pPr>
+            <a:r>
+              <a:rPr sz="1200" b="0" i="0">
+                <a:solidFill>
+                  <a:srgbClr val="E7F0F3"/>
+                </a:solidFill>
+                <a:latin typeface="Arial"/>
+              </a:rPr>
+              <a:t>integrand × R  (log axis)</a:t>
+            </a:r>
+          </a:p>
+        </p:txBody>
+      </p:sp>
+      <p:sp>
+        <p:nvSpPr>
+          <p:cNvPr id="38" name="A-E03 polygon 36" descr="sci-ppt:o036"/>
+          <p:cNvSpPr/>
+          <p:nvPr/>
+        </p:nvSpPr>
+        <p:spPr>
+          <a:xfrm>
+            <a:off x="914400" y="1541428"/>
+            <a:ext cx="5852160" cy="3487772"/>
+          </a:xfrm>
+          <a:custGeom>
+            <a:avLst/>
+            <a:gdLst/>
+            <a:ahLst/>
+            <a:cxnLst/>
+            <a:rect l="l" t="t" r="r" b="b"/>
+            <a:pathLst>
+              <a:path w="5852160" h="3487772">
+                <a:moveTo>
+                  <a:pt x="0" y="0"/>
+                </a:moveTo>
+                <a:lnTo>
+                  <a:pt x="29407" y="630464"/>
+                </a:lnTo>
+                <a:lnTo>
+                  <a:pt x="58815" y="779752"/>
+                </a:lnTo>
+                <a:lnTo>
+                  <a:pt x="88223" y="871860"/>
+                </a:lnTo>
+                <a:lnTo>
+                  <a:pt x="117631" y="940743"/>
+                </a:lnTo>
+                <a:lnTo>
+                  <a:pt x="147039" y="997175"/>
+                </a:lnTo>
+                <a:lnTo>
+                  <a:pt x="176447" y="1045903"/>
+                </a:lnTo>
+                <a:lnTo>
+                  <a:pt x="205854" y="1089414"/>
+                </a:lnTo>
+                <a:lnTo>
+                  <a:pt x="235262" y="1129159"/>
+                </a:lnTo>
+                <a:lnTo>
+                  <a:pt x="264670" y="1166049"/>
+                </a:lnTo>
+                <a:lnTo>
+                  <a:pt x="294078" y="1200693"/>
+                </a:lnTo>
+                <a:lnTo>
+                  <a:pt x="323486" y="1233513"/>
+                </a:lnTo>
+                <a:lnTo>
+                  <a:pt x="352894" y="1264814"/>
+                </a:lnTo>
+                <a:lnTo>
+                  <a:pt x="382301" y="1294824"/>
+                </a:lnTo>
+                <a:lnTo>
+                  <a:pt x="411709" y="1323717"/>
+                </a:lnTo>
+                <a:lnTo>
+                  <a:pt x="441117" y="1351627"/>
+                </a:lnTo>
+                <a:lnTo>
+                  <a:pt x="470525" y="1378663"/>
+                </a:lnTo>
+                <a:lnTo>
+                  <a:pt x="499933" y="1404912"/>
+                </a:lnTo>
+                <a:lnTo>
+                  <a:pt x="529341" y="1430445"/>
+                </a:lnTo>
+                <a:lnTo>
+                  <a:pt x="558748" y="1455324"/>
+                </a:lnTo>
+                <a:lnTo>
+                  <a:pt x="588156" y="1479598"/>
+                </a:lnTo>
+                <a:lnTo>
+                  <a:pt x="617564" y="1503312"/>
+                </a:lnTo>
+                <a:lnTo>
+                  <a:pt x="646972" y="1526502"/>
+                </a:lnTo>
+                <a:lnTo>
+                  <a:pt x="676380" y="1549201"/>
+                </a:lnTo>
+                <a:lnTo>
+                  <a:pt x="705788" y="1571439"/>
+                </a:lnTo>
+                <a:lnTo>
+                  <a:pt x="735195" y="1593240"/>
+                </a:lnTo>
+                <a:lnTo>
+                  <a:pt x="764603" y="1614628"/>
+                </a:lnTo>
+                <a:lnTo>
+                  <a:pt x="794011" y="1635622"/>
+                </a:lnTo>
+                <a:lnTo>
+                  <a:pt x="823419" y="1656243"/>
+                </a:lnTo>
+                <a:lnTo>
+                  <a:pt x="852827" y="1676506"/>
+                </a:lnTo>
+                <a:lnTo>
+                  <a:pt x="882235" y="1696427"/>
+                </a:lnTo>
+                <a:lnTo>
+                  <a:pt x="911643" y="1716019"/>
+                </a:lnTo>
+                <a:lnTo>
+                  <a:pt x="941050" y="1735297"/>
+                </a:lnTo>
+                <a:lnTo>
+                  <a:pt x="970458" y="1754272"/>
+                </a:lnTo>
+                <a:lnTo>
+                  <a:pt x="999866" y="1772956"/>
+                </a:lnTo>
+                <a:lnTo>
+                  <a:pt x="1029274" y="1791358"/>
+                </a:lnTo>
+                <a:lnTo>
+                  <a:pt x="1058682" y="1809489"/>
+                </a:lnTo>
+                <a:lnTo>
+                  <a:pt x="1088090" y="1827358"/>
+                </a:lnTo>
+                <a:lnTo>
+                  <a:pt x="1117497" y="1844973"/>
+                </a:lnTo>
+                <a:lnTo>
+                  <a:pt x="1146905" y="1862343"/>
+                </a:lnTo>
+                <a:lnTo>
+                  <a:pt x="1176313" y="1879475"/>
+                </a:lnTo>
+                <a:lnTo>
+                  <a:pt x="1205721" y="1896376"/>
+                </a:lnTo>
+                <a:lnTo>
+                  <a:pt x="1235129" y="1913054"/>
+                </a:lnTo>
+                <a:lnTo>
+                  <a:pt x="1264537" y="1929514"/>
+                </a:lnTo>
+                <a:lnTo>
+                  <a:pt x="1293944" y="1945762"/>
+                </a:lnTo>
+                <a:lnTo>
+                  <a:pt x="1323352" y="1961806"/>
+                </a:lnTo>
+                <a:lnTo>
+                  <a:pt x="1352760" y="1977650"/>
+                </a:lnTo>
+                <a:lnTo>
+                  <a:pt x="1382168" y="1993300"/>
+                </a:lnTo>
+                <a:lnTo>
+                  <a:pt x="1411576" y="2008760"/>
+                </a:lnTo>
+                <a:lnTo>
+                  <a:pt x="1440984" y="2024036"/>
+                </a:lnTo>
+                <a:lnTo>
+                  <a:pt x="1470391" y="2039132"/>
+                </a:lnTo>
+                <a:lnTo>
+                  <a:pt x="1499799" y="2054053"/>
+                </a:lnTo>
+                <a:lnTo>
+                  <a:pt x="1529207" y="2068802"/>
+                </a:lnTo>
+                <a:lnTo>
+                  <a:pt x="1558615" y="2083385"/>
+                </a:lnTo>
+                <a:lnTo>
+                  <a:pt x="1588023" y="2097806"/>
+                </a:lnTo>
+                <a:lnTo>
+                  <a:pt x="1617431" y="2112067"/>
+                </a:lnTo>
+                <a:lnTo>
+                  <a:pt x="1646838" y="2126172"/>
+                </a:lnTo>
+                <a:lnTo>
+                  <a:pt x="1676246" y="2140126"/>
+                </a:lnTo>
+                <a:lnTo>
+                  <a:pt x="1705654" y="2153931"/>
+                </a:lnTo>
+                <a:lnTo>
+                  <a:pt x="1735062" y="2167591"/>
+                </a:lnTo>
+                <a:lnTo>
+                  <a:pt x="1764470" y="2181108"/>
+                </a:lnTo>
+                <a:lnTo>
+                  <a:pt x="1793878" y="2194487"/>
+                </a:lnTo>
+                <a:lnTo>
+                  <a:pt x="1823286" y="2207729"/>
+                </a:lnTo>
+                <a:lnTo>
+                  <a:pt x="1852693" y="2220839"/>
+                </a:lnTo>
+                <a:lnTo>
+                  <a:pt x="1882101" y="2233818"/>
+                </a:lnTo>
+                <a:lnTo>
+                  <a:pt x="1911509" y="2246668"/>
+                </a:lnTo>
+                <a:lnTo>
+                  <a:pt x="1940917" y="2259394"/>
+                </a:lnTo>
+                <a:lnTo>
+                  <a:pt x="1970325" y="2271997"/>
+                </a:lnTo>
+                <a:lnTo>
+                  <a:pt x="1999733" y="2284480"/>
+                </a:lnTo>
+                <a:lnTo>
+                  <a:pt x="2029140" y="2296844"/>
+                </a:lnTo>
+                <a:lnTo>
+                  <a:pt x="2058548" y="2309093"/>
+                </a:lnTo>
+                <a:lnTo>
+                  <a:pt x="2087956" y="2321229"/>
+                </a:lnTo>
+                <a:lnTo>
+                  <a:pt x="2117364" y="2333253"/>
+                </a:lnTo>
+                <a:lnTo>
+                  <a:pt x="2146772" y="2345167"/>
+                </a:lnTo>
+                <a:lnTo>
+                  <a:pt x="2176180" y="2356975"/>
+                </a:lnTo>
+                <a:lnTo>
+                  <a:pt x="2205587" y="2368677"/>
+                </a:lnTo>
+                <a:lnTo>
+                  <a:pt x="2234995" y="2380276"/>
+                </a:lnTo>
+                <a:lnTo>
+                  <a:pt x="2264403" y="2391773"/>
+                </a:lnTo>
+                <a:lnTo>
+                  <a:pt x="2293811" y="2403170"/>
+                </a:lnTo>
+                <a:lnTo>
+                  <a:pt x="2323219" y="2414470"/>
+                </a:lnTo>
+                <a:lnTo>
+                  <a:pt x="2352627" y="2425673"/>
+                </a:lnTo>
+                <a:lnTo>
+                  <a:pt x="2382034" y="2436781"/>
+                </a:lnTo>
+                <a:lnTo>
+                  <a:pt x="2411442" y="2447797"/>
+                </a:lnTo>
+                <a:lnTo>
+                  <a:pt x="2440850" y="2458721"/>
+                </a:lnTo>
+                <a:lnTo>
+                  <a:pt x="2470258" y="2469555"/>
+                </a:lnTo>
+                <a:lnTo>
+                  <a:pt x="2499666" y="2480300"/>
+                </a:lnTo>
+                <a:lnTo>
+                  <a:pt x="2529074" y="2490959"/>
+                </a:lnTo>
+                <a:lnTo>
+                  <a:pt x="2558482" y="2501532"/>
+                </a:lnTo>
+                <a:lnTo>
+                  <a:pt x="2587889" y="2512021"/>
+                </a:lnTo>
+                <a:lnTo>
+                  <a:pt x="2617297" y="2522427"/>
+                </a:lnTo>
+                <a:lnTo>
+                  <a:pt x="2646705" y="2532752"/>
+                </a:lnTo>
+                <a:lnTo>
+                  <a:pt x="2676113" y="2542996"/>
+                </a:lnTo>
+                <a:lnTo>
+                  <a:pt x="2705521" y="2553162"/>
+                </a:lnTo>
+                <a:lnTo>
+                  <a:pt x="2734929" y="2563250"/>
+                </a:lnTo>
+                <a:lnTo>
+                  <a:pt x="2764336" y="2573261"/>
+                </a:lnTo>
+                <a:lnTo>
+                  <a:pt x="2793744" y="2583197"/>
+                </a:lnTo>
+                <a:lnTo>
+                  <a:pt x="2823152" y="2593058"/>
+                </a:lnTo>
+                <a:lnTo>
+                  <a:pt x="2852560" y="2602847"/>
+                </a:lnTo>
+                <a:lnTo>
+                  <a:pt x="2881968" y="2612563"/>
+                </a:lnTo>
+                <a:lnTo>
+                  <a:pt x="2911376" y="2622209"/>
+                </a:lnTo>
+                <a:lnTo>
+                  <a:pt x="2940783" y="2631784"/>
+                </a:lnTo>
+                <a:lnTo>
+                  <a:pt x="2970191" y="2641291"/>
+                </a:lnTo>
+                <a:lnTo>
+                  <a:pt x="2999599" y="2650730"/>
+                </a:lnTo>
+                <a:lnTo>
+                  <a:pt x="3029007" y="2660102"/>
+                </a:lnTo>
+                <a:lnTo>
+                  <a:pt x="3058415" y="2669407"/>
+                </a:lnTo>
+                <a:lnTo>
+                  <a:pt x="3087823" y="2678648"/>
+                </a:lnTo>
+                <a:lnTo>
+                  <a:pt x="3117230" y="2687825"/>
+                </a:lnTo>
+                <a:lnTo>
+                  <a:pt x="3146638" y="2696938"/>
+                </a:lnTo>
+                <a:lnTo>
+                  <a:pt x="3176046" y="2705989"/>
+                </a:lnTo>
+                <a:lnTo>
+                  <a:pt x="3205454" y="2714979"/>
+                </a:lnTo>
+                <a:lnTo>
+                  <a:pt x="3234862" y="2723908"/>
+                </a:lnTo>
+                <a:lnTo>
+                  <a:pt x="3264270" y="2732777"/>
+                </a:lnTo>
+                <a:lnTo>
+                  <a:pt x="3293677" y="2741587"/>
+                </a:lnTo>
+                <a:lnTo>
+                  <a:pt x="3323085" y="2750338"/>
+                </a:lnTo>
+                <a:lnTo>
+                  <a:pt x="3352493" y="2759032"/>
+                </a:lnTo>
+                <a:lnTo>
+                  <a:pt x="3381901" y="2767670"/>
+                </a:lnTo>
+                <a:lnTo>
+                  <a:pt x="3411309" y="2776251"/>
+                </a:lnTo>
+                <a:lnTo>
+                  <a:pt x="3440717" y="2784777"/>
+                </a:lnTo>
+                <a:lnTo>
+                  <a:pt x="3470125" y="2793249"/>
+                </a:lnTo>
+                <a:lnTo>
+                  <a:pt x="3499532" y="2801667"/>
+                </a:lnTo>
+                <a:lnTo>
+                  <a:pt x="3528940" y="2810031"/>
+                </a:lnTo>
+                <a:lnTo>
+                  <a:pt x="3558348" y="2818343"/>
+                </a:lnTo>
+                <a:lnTo>
+                  <a:pt x="3587756" y="2826603"/>
+                </a:lnTo>
+                <a:lnTo>
+                  <a:pt x="3617164" y="2834812"/>
+                </a:lnTo>
+                <a:lnTo>
+                  <a:pt x="3646572" y="2842971"/>
+                </a:lnTo>
+                <a:lnTo>
+                  <a:pt x="3675979" y="2851079"/>
+                </a:lnTo>
+                <a:lnTo>
+                  <a:pt x="3705387" y="2859138"/>
+                </a:lnTo>
+                <a:lnTo>
+                  <a:pt x="3734795" y="2867149"/>
+                </a:lnTo>
+                <a:lnTo>
+                  <a:pt x="3764203" y="2875111"/>
+                </a:lnTo>
+                <a:lnTo>
+                  <a:pt x="3793611" y="2883026"/>
+                </a:lnTo>
+                <a:lnTo>
+                  <a:pt x="3823019" y="2890893"/>
+                </a:lnTo>
+                <a:lnTo>
+                  <a:pt x="3852426" y="2898715"/>
+                </a:lnTo>
+                <a:lnTo>
+                  <a:pt x="3881834" y="2906490"/>
+                </a:lnTo>
+                <a:lnTo>
+                  <a:pt x="3911242" y="2914220"/>
+                </a:lnTo>
+                <a:lnTo>
+                  <a:pt x="3940650" y="2921905"/>
+                </a:lnTo>
+                <a:lnTo>
+                  <a:pt x="3970058" y="2929546"/>
+                </a:lnTo>
+                <a:lnTo>
+                  <a:pt x="3999466" y="2937144"/>
+                </a:lnTo>
+                <a:lnTo>
+                  <a:pt x="4028873" y="2944697"/>
+                </a:lnTo>
+                <a:lnTo>
+                  <a:pt x="4058281" y="2952208"/>
+                </a:lnTo>
+                <a:lnTo>
+                  <a:pt x="4087689" y="2959677"/>
+                </a:lnTo>
+                <a:lnTo>
+                  <a:pt x="4117097" y="2967104"/>
+                </a:lnTo>
+                <a:lnTo>
+                  <a:pt x="4146505" y="2974490"/>
+                </a:lnTo>
+                <a:lnTo>
+                  <a:pt x="4175913" y="2981834"/>
+                </a:lnTo>
+                <a:lnTo>
+                  <a:pt x="4205321" y="2989138"/>
+                </a:lnTo>
+                <a:lnTo>
+                  <a:pt x="4234728" y="2996403"/>
+                </a:lnTo>
+                <a:lnTo>
+                  <a:pt x="4264136" y="3003627"/>
+                </a:lnTo>
+                <a:lnTo>
+                  <a:pt x="4293544" y="3010813"/>
+                </a:lnTo>
+                <a:lnTo>
+                  <a:pt x="4322952" y="3017959"/>
+                </a:lnTo>
+                <a:lnTo>
+                  <a:pt x="4352360" y="3025068"/>
+                </a:lnTo>
+                <a:lnTo>
+                  <a:pt x="4381768" y="3032138"/>
+                </a:lnTo>
+                <a:lnTo>
+                  <a:pt x="4411175" y="3039172"/>
+                </a:lnTo>
+                <a:lnTo>
+                  <a:pt x="4440583" y="3046167"/>
+                </a:lnTo>
+                <a:lnTo>
+                  <a:pt x="4469991" y="3053127"/>
+                </a:lnTo>
+                <a:lnTo>
+                  <a:pt x="4499399" y="3060050"/>
+                </a:lnTo>
+                <a:lnTo>
+                  <a:pt x="4528807" y="3066937"/>
+                </a:lnTo>
+                <a:lnTo>
+                  <a:pt x="4558215" y="3073788"/>
+                </a:lnTo>
+                <a:lnTo>
+                  <a:pt x="4587622" y="3080604"/>
+                </a:lnTo>
+                <a:lnTo>
+                  <a:pt x="4617030" y="3087386"/>
+                </a:lnTo>
+                <a:lnTo>
+                  <a:pt x="4646438" y="3094133"/>
+                </a:lnTo>
+                <a:lnTo>
+                  <a:pt x="4675846" y="3100846"/>
+                </a:lnTo>
+                <a:lnTo>
+                  <a:pt x="4705254" y="3107525"/>
+                </a:lnTo>
+                <a:lnTo>
+                  <a:pt x="4734662" y="3114170"/>
+                </a:lnTo>
+                <a:lnTo>
+                  <a:pt x="4764069" y="3120783"/>
+                </a:lnTo>
+                <a:lnTo>
+                  <a:pt x="4793477" y="3127362"/>
+                </a:lnTo>
+                <a:lnTo>
+                  <a:pt x="4822885" y="3133910"/>
+                </a:lnTo>
+                <a:lnTo>
+                  <a:pt x="4852293" y="3140425"/>
+                </a:lnTo>
+                <a:lnTo>
+                  <a:pt x="4881701" y="3146908"/>
+                </a:lnTo>
+                <a:lnTo>
+                  <a:pt x="4911109" y="3153360"/>
+                </a:lnTo>
+                <a:lnTo>
+                  <a:pt x="4940516" y="3159780"/>
+                </a:lnTo>
+                <a:lnTo>
+                  <a:pt x="4969924" y="3166170"/>
+                </a:lnTo>
+                <a:lnTo>
+                  <a:pt x="4999332" y="3172529"/>
+                </a:lnTo>
+                <a:lnTo>
+                  <a:pt x="5028740" y="3178858"/>
+                </a:lnTo>
+                <a:lnTo>
+                  <a:pt x="5058148" y="3185156"/>
+                </a:lnTo>
+                <a:lnTo>
+                  <a:pt x="5087556" y="3191425"/>
+                </a:lnTo>
+                <a:lnTo>
+                  <a:pt x="5116964" y="3197665"/>
+                </a:lnTo>
+                <a:lnTo>
+                  <a:pt x="5146371" y="3203875"/>
+                </a:lnTo>
+                <a:lnTo>
+                  <a:pt x="5175779" y="3210056"/>
+                </a:lnTo>
+                <a:lnTo>
+                  <a:pt x="5205187" y="3216209"/>
+                </a:lnTo>
+                <a:lnTo>
+                  <a:pt x="5234595" y="3222333"/>
+                </a:lnTo>
+                <a:lnTo>
+                  <a:pt x="5264003" y="3228430"/>
+                </a:lnTo>
+                <a:lnTo>
+                  <a:pt x="5293411" y="3234498"/>
+                </a:lnTo>
+                <a:lnTo>
+                  <a:pt x="5322818" y="3240539"/>
+                </a:lnTo>
+                <a:lnTo>
+                  <a:pt x="5352226" y="3246552"/>
+                </a:lnTo>
+                <a:lnTo>
+                  <a:pt x="5381634" y="3252538"/>
+                </a:lnTo>
+                <a:lnTo>
+                  <a:pt x="5411042" y="3258498"/>
+                </a:lnTo>
+                <a:lnTo>
+                  <a:pt x="5440450" y="3264430"/>
+                </a:lnTo>
+                <a:lnTo>
+                  <a:pt x="5469858" y="3270337"/>
+                </a:lnTo>
+                <a:lnTo>
+                  <a:pt x="5499265" y="3276217"/>
+                </a:lnTo>
+                <a:lnTo>
+                  <a:pt x="5528673" y="3282071"/>
+                </a:lnTo>
+                <a:lnTo>
+                  <a:pt x="5558081" y="3287900"/>
+                </a:lnTo>
+                <a:lnTo>
+                  <a:pt x="5587489" y="3293703"/>
+                </a:lnTo>
+                <a:lnTo>
+                  <a:pt x="5616897" y="3299481"/>
+                </a:lnTo>
+                <a:lnTo>
+                  <a:pt x="5646305" y="3305234"/>
+                </a:lnTo>
+                <a:lnTo>
+                  <a:pt x="5675712" y="3310962"/>
+                </a:lnTo>
+                <a:lnTo>
+                  <a:pt x="5705120" y="3316665"/>
+                </a:lnTo>
+                <a:lnTo>
+                  <a:pt x="5734528" y="3322344"/>
+                </a:lnTo>
+                <a:lnTo>
+                  <a:pt x="5763936" y="3327999"/>
+                </a:lnTo>
+                <a:lnTo>
+                  <a:pt x="5793344" y="3333630"/>
+                </a:lnTo>
+                <a:lnTo>
+                  <a:pt x="5822752" y="3339237"/>
+                </a:lnTo>
+                <a:lnTo>
+                  <a:pt x="5852160" y="3344821"/>
+                </a:lnTo>
+                <a:lnTo>
+                  <a:pt x="5852160" y="3487772"/>
+                </a:lnTo>
+                <a:lnTo>
+                  <a:pt x="5822752" y="3487772"/>
+                </a:lnTo>
+                <a:lnTo>
+                  <a:pt x="5793344" y="3487772"/>
+                </a:lnTo>
+                <a:lnTo>
+                  <a:pt x="5763936" y="3487772"/>
+                </a:lnTo>
+                <a:lnTo>
+                  <a:pt x="5734528" y="3487772"/>
+                </a:lnTo>
+                <a:lnTo>
+                  <a:pt x="5705120" y="3487772"/>
+                </a:lnTo>
+                <a:lnTo>
+                  <a:pt x="5675712" y="3487772"/>
+                </a:lnTo>
+                <a:lnTo>
+                  <a:pt x="5646305" y="3487772"/>
+                </a:lnTo>
+                <a:lnTo>
+                  <a:pt x="5616897" y="3487772"/>
+                </a:lnTo>
+                <a:lnTo>
+                  <a:pt x="5587489" y="3487772"/>
+                </a:lnTo>
+                <a:lnTo>
+                  <a:pt x="5558081" y="3487772"/>
+                </a:lnTo>
+                <a:lnTo>
+                  <a:pt x="5528673" y="3487772"/>
+                </a:lnTo>
+                <a:lnTo>
+                  <a:pt x="5499265" y="3487772"/>
+                </a:lnTo>
+                <a:lnTo>
+                  <a:pt x="5469858" y="3487772"/>
+                </a:lnTo>
+                <a:lnTo>
+                  <a:pt x="5440450" y="3487772"/>
+                </a:lnTo>
+                <a:lnTo>
+                  <a:pt x="5411042" y="3487772"/>
+                </a:lnTo>
+                <a:lnTo>
+                  <a:pt x="5381634" y="3487772"/>
+                </a:lnTo>
+                <a:lnTo>
+                  <a:pt x="5352226" y="3487772"/>
+                </a:lnTo>
+                <a:lnTo>
+                  <a:pt x="5322818" y="3487772"/>
+                </a:lnTo>
+                <a:lnTo>
+                  <a:pt x="5293411" y="3487772"/>
+                </a:lnTo>
+                <a:lnTo>
+                  <a:pt x="5264003" y="3487772"/>
+                </a:lnTo>
+                <a:lnTo>
+                  <a:pt x="5234595" y="3487772"/>
+                </a:lnTo>
+                <a:lnTo>
+                  <a:pt x="5205187" y="3487772"/>
+                </a:lnTo>
+                <a:lnTo>
+                  <a:pt x="5175779" y="3487772"/>
+                </a:lnTo>
+                <a:lnTo>
+                  <a:pt x="5146371" y="3487772"/>
+                </a:lnTo>
+                <a:lnTo>
+                  <a:pt x="5116964" y="3487772"/>
+                </a:lnTo>
+                <a:lnTo>
+                  <a:pt x="5087556" y="3487772"/>
+                </a:lnTo>
+                <a:lnTo>
+                  <a:pt x="5058148" y="3487772"/>
+                </a:lnTo>
+                <a:lnTo>
+                  <a:pt x="5028740" y="3487772"/>
+                </a:lnTo>
+                <a:lnTo>
+                  <a:pt x="4999332" y="3487772"/>
+                </a:lnTo>
+                <a:lnTo>
+                  <a:pt x="4969924" y="3487772"/>
+                </a:lnTo>
+                <a:lnTo>
+                  <a:pt x="4940516" y="3487772"/>
+                </a:lnTo>
+                <a:lnTo>
+                  <a:pt x="4911109" y="3487772"/>
+                </a:lnTo>
+                <a:lnTo>
+                  <a:pt x="4881701" y="3487772"/>
+                </a:lnTo>
+                <a:lnTo>
+                  <a:pt x="4852293" y="3487772"/>
+                </a:lnTo>
+                <a:lnTo>
+                  <a:pt x="4822885" y="3487772"/>
+                </a:lnTo>
+                <a:lnTo>
+                  <a:pt x="4793477" y="3487772"/>
+                </a:lnTo>
+                <a:lnTo>
+                  <a:pt x="4764069" y="3487772"/>
+                </a:lnTo>
+                <a:lnTo>
+                  <a:pt x="4734662" y="3487772"/>
+                </a:lnTo>
+                <a:lnTo>
+                  <a:pt x="4705254" y="3487772"/>
+                </a:lnTo>
+                <a:lnTo>
+                  <a:pt x="4675846" y="3487772"/>
+                </a:lnTo>
+                <a:lnTo>
+                  <a:pt x="4646438" y="3487772"/>
+                </a:lnTo>
+                <a:lnTo>
+                  <a:pt x="4617030" y="3487772"/>
+                </a:lnTo>
+                <a:lnTo>
+                  <a:pt x="4587622" y="3487772"/>
+                </a:lnTo>
+                <a:lnTo>
+                  <a:pt x="4558215" y="3487772"/>
+                </a:lnTo>
+                <a:lnTo>
+                  <a:pt x="4528807" y="3487772"/>
+                </a:lnTo>
+                <a:lnTo>
+                  <a:pt x="4499399" y="3487772"/>
+                </a:lnTo>
+                <a:lnTo>
+                  <a:pt x="4469991" y="3487772"/>
+                </a:lnTo>
+                <a:lnTo>
+                  <a:pt x="4440583" y="3487772"/>
+                </a:lnTo>
+                <a:lnTo>
+                  <a:pt x="4411175" y="3487772"/>
+                </a:lnTo>
+                <a:lnTo>
+                  <a:pt x="4381768" y="3487772"/>
+                </a:lnTo>
+                <a:lnTo>
+                  <a:pt x="4352360" y="3487772"/>
+                </a:lnTo>
+                <a:lnTo>
+                  <a:pt x="4322952" y="3487772"/>
+                </a:lnTo>
+                <a:lnTo>
+                  <a:pt x="4293544" y="3487772"/>
+                </a:lnTo>
+                <a:lnTo>
+                  <a:pt x="4264136" y="3487772"/>
+                </a:lnTo>
+                <a:lnTo>
+                  <a:pt x="4234728" y="3487772"/>
+                </a:lnTo>
+                <a:lnTo>
+                  <a:pt x="4205321" y="3487772"/>
+                </a:lnTo>
+                <a:lnTo>
+                  <a:pt x="4175913" y="3487772"/>
+                </a:lnTo>
+                <a:lnTo>
+                  <a:pt x="4146505" y="3487772"/>
+                </a:lnTo>
+                <a:lnTo>
+                  <a:pt x="4117097" y="3487772"/>
+                </a:lnTo>
+                <a:lnTo>
+                  <a:pt x="4087689" y="3487772"/>
+                </a:lnTo>
+                <a:lnTo>
+                  <a:pt x="4058281" y="3487772"/>
+                </a:lnTo>
+                <a:lnTo>
+                  <a:pt x="4028873" y="3487772"/>
+                </a:lnTo>
+                <a:lnTo>
+                  <a:pt x="3999466" y="3487772"/>
+                </a:lnTo>
+                <a:lnTo>
+                  <a:pt x="3970058" y="3487772"/>
+                </a:lnTo>
+                <a:lnTo>
+                  <a:pt x="3940650" y="3487772"/>
+                </a:lnTo>
+                <a:lnTo>
+                  <a:pt x="3911242" y="3487772"/>
+                </a:lnTo>
+                <a:lnTo>
+                  <a:pt x="3881834" y="3487772"/>
+                </a:lnTo>
+                <a:lnTo>
+                  <a:pt x="3852426" y="3487772"/>
+                </a:lnTo>
+                <a:lnTo>
+                  <a:pt x="3823019" y="3487772"/>
+                </a:lnTo>
+                <a:lnTo>
+                  <a:pt x="3793611" y="3487772"/>
+                </a:lnTo>
+                <a:lnTo>
+                  <a:pt x="3764203" y="3487772"/>
+                </a:lnTo>
+                <a:lnTo>
+                  <a:pt x="3734795" y="3487772"/>
+                </a:lnTo>
+                <a:lnTo>
+                  <a:pt x="3705387" y="3487772"/>
+                </a:lnTo>
+                <a:lnTo>
+                  <a:pt x="3675979" y="3487772"/>
+                </a:lnTo>
+                <a:lnTo>
+                  <a:pt x="3646572" y="3487772"/>
+                </a:lnTo>
+                <a:lnTo>
+                  <a:pt x="3617164" y="3487772"/>
+                </a:lnTo>
+                <a:lnTo>
+                  <a:pt x="3587756" y="3487772"/>
+                </a:lnTo>
+                <a:lnTo>
+                  <a:pt x="3558348" y="3487772"/>
+                </a:lnTo>
+                <a:lnTo>
+                  <a:pt x="3528940" y="3487772"/>
+                </a:lnTo>
+                <a:lnTo>
+                  <a:pt x="3499532" y="3487772"/>
+                </a:lnTo>
+                <a:lnTo>
+                  <a:pt x="3470125" y="3487772"/>
+                </a:lnTo>
+                <a:lnTo>
+                  <a:pt x="3440717" y="3487772"/>
+                </a:lnTo>
+                <a:lnTo>
+                  <a:pt x="3411309" y="3487772"/>
+                </a:lnTo>
+                <a:lnTo>
+                  <a:pt x="3381901" y="3487772"/>
+                </a:lnTo>
+                <a:lnTo>
+                  <a:pt x="3352493" y="3487772"/>
+                </a:lnTo>
+                <a:lnTo>
+                  <a:pt x="3323085" y="3487772"/>
+                </a:lnTo>
+                <a:lnTo>
+                  <a:pt x="3293677" y="3487772"/>
+                </a:lnTo>
+                <a:lnTo>
+                  <a:pt x="3264270" y="3487772"/>
+                </a:lnTo>
+                <a:lnTo>
+                  <a:pt x="3234862" y="3487772"/>
+                </a:lnTo>
+                <a:lnTo>
+                  <a:pt x="3205454" y="3487772"/>
+                </a:lnTo>
+                <a:lnTo>
+                  <a:pt x="3176046" y="3487772"/>
+                </a:lnTo>
+                <a:lnTo>
+                  <a:pt x="3146638" y="3487772"/>
+                </a:lnTo>
+                <a:lnTo>
+                  <a:pt x="3117230" y="3487772"/>
+                </a:lnTo>
+                <a:lnTo>
+                  <a:pt x="3087823" y="3487772"/>
+                </a:lnTo>
+                <a:lnTo>
+                  <a:pt x="3058415" y="3487772"/>
+                </a:lnTo>
+                <a:lnTo>
+                  <a:pt x="3029007" y="3487772"/>
+                </a:lnTo>
+                <a:lnTo>
+                  <a:pt x="2999599" y="3487772"/>
+                </a:lnTo>
+                <a:lnTo>
+                  <a:pt x="2970191" y="3487772"/>
+                </a:lnTo>
+                <a:lnTo>
+                  <a:pt x="2940783" y="3487772"/>
+                </a:lnTo>
+                <a:lnTo>
+                  <a:pt x="2911376" y="3487772"/>
+                </a:lnTo>
+                <a:lnTo>
+                  <a:pt x="2881968" y="3487772"/>
+                </a:lnTo>
+                <a:lnTo>
+                  <a:pt x="2852560" y="3487772"/>
+                </a:lnTo>
+                <a:lnTo>
+                  <a:pt x="2823152" y="3487772"/>
+                </a:lnTo>
+                <a:lnTo>
+                  <a:pt x="2793744" y="3487772"/>
+                </a:lnTo>
+                <a:lnTo>
+                  <a:pt x="2764336" y="3487772"/>
+                </a:lnTo>
+                <a:lnTo>
+                  <a:pt x="2734929" y="3487772"/>
+                </a:lnTo>
+                <a:lnTo>
+                  <a:pt x="2705521" y="3487772"/>
+                </a:lnTo>
+                <a:lnTo>
+                  <a:pt x="2676113" y="3487772"/>
+                </a:lnTo>
+                <a:lnTo>
+                  <a:pt x="2646705" y="3487772"/>
+                </a:lnTo>
+                <a:lnTo>
+                  <a:pt x="2617297" y="3487772"/>
+                </a:lnTo>
+                <a:lnTo>
+                  <a:pt x="2587889" y="3487772"/>
+                </a:lnTo>
+                <a:lnTo>
+                  <a:pt x="2558482" y="3487772"/>
+                </a:lnTo>
+                <a:lnTo>
+                  <a:pt x="2529074" y="3487772"/>
+                </a:lnTo>
+                <a:lnTo>
+                  <a:pt x="2499666" y="3487772"/>
+                </a:lnTo>
+                <a:lnTo>
+                  <a:pt x="2470258" y="3487772"/>
+                </a:lnTo>
+                <a:lnTo>
+                  <a:pt x="2440850" y="3487772"/>
+                </a:lnTo>
+                <a:lnTo>
+                  <a:pt x="2411442" y="3487772"/>
+                </a:lnTo>
+                <a:lnTo>
+                  <a:pt x="2382034" y="3487772"/>
+                </a:lnTo>
+                <a:lnTo>
+                  <a:pt x="2352627" y="3487772"/>
+                </a:lnTo>
+                <a:lnTo>
+                  <a:pt x="2323219" y="3487772"/>
+                </a:lnTo>
+                <a:lnTo>
+                  <a:pt x="2293811" y="3487772"/>
+                </a:lnTo>
+                <a:lnTo>
+                  <a:pt x="2264403" y="3487772"/>
+                </a:lnTo>
+                <a:lnTo>
+                  <a:pt x="2234995" y="3487772"/>
+                </a:lnTo>
+                <a:lnTo>
+                  <a:pt x="2205587" y="3487772"/>
+                </a:lnTo>
+                <a:lnTo>
+                  <a:pt x="2176180" y="3487772"/>
+                </a:lnTo>
+                <a:lnTo>
+                  <a:pt x="2146772" y="3487772"/>
+                </a:lnTo>
+                <a:lnTo>
+                  <a:pt x="2117364" y="3487772"/>
+                </a:lnTo>
+                <a:lnTo>
+                  <a:pt x="2087956" y="3487772"/>
+                </a:lnTo>
+                <a:lnTo>
+                  <a:pt x="2058548" y="3487772"/>
+                </a:lnTo>
+                <a:lnTo>
+                  <a:pt x="2029140" y="3487772"/>
+                </a:lnTo>
+                <a:lnTo>
+                  <a:pt x="1999733" y="3487772"/>
+                </a:lnTo>
+                <a:lnTo>
+                  <a:pt x="1970325" y="3487772"/>
+                </a:lnTo>
+                <a:lnTo>
+                  <a:pt x="1940917" y="3487772"/>
+                </a:lnTo>
+                <a:lnTo>
+                  <a:pt x="1911509" y="3487772"/>
+                </a:lnTo>
+                <a:lnTo>
+                  <a:pt x="1882101" y="3487772"/>
+                </a:lnTo>
+                <a:lnTo>
+                  <a:pt x="1852693" y="3487772"/>
+                </a:lnTo>
+                <a:lnTo>
+                  <a:pt x="1823286" y="3487772"/>
+                </a:lnTo>
+                <a:lnTo>
+                  <a:pt x="1793878" y="3487772"/>
+                </a:lnTo>
+                <a:lnTo>
+                  <a:pt x="1764470" y="3487772"/>
+                </a:lnTo>
+                <a:lnTo>
+                  <a:pt x="1735062" y="3487772"/>
+                </a:lnTo>
+                <a:lnTo>
+                  <a:pt x="1705654" y="3487772"/>
+                </a:lnTo>
+                <a:lnTo>
+                  <a:pt x="1676246" y="3487772"/>
+                </a:lnTo>
+                <a:lnTo>
+                  <a:pt x="1646838" y="3487772"/>
+                </a:lnTo>
+                <a:lnTo>
+                  <a:pt x="1617431" y="3487772"/>
+                </a:lnTo>
+                <a:lnTo>
+                  <a:pt x="1588023" y="3487772"/>
+                </a:lnTo>
+                <a:lnTo>
+                  <a:pt x="1558615" y="3487772"/>
+                </a:lnTo>
+                <a:lnTo>
+                  <a:pt x="1529207" y="3487772"/>
+                </a:lnTo>
+                <a:lnTo>
+                  <a:pt x="1499799" y="3487772"/>
+                </a:lnTo>
+                <a:lnTo>
+                  <a:pt x="1470391" y="3487772"/>
+                </a:lnTo>
+                <a:lnTo>
+                  <a:pt x="1440984" y="3487772"/>
+                </a:lnTo>
+                <a:lnTo>
+                  <a:pt x="1411576" y="3487772"/>
+                </a:lnTo>
+                <a:lnTo>
+                  <a:pt x="1382168" y="3487772"/>
+                </a:lnTo>
+                <a:lnTo>
+                  <a:pt x="1352760" y="3487772"/>
+                </a:lnTo>
+                <a:lnTo>
+                  <a:pt x="1323352" y="3487772"/>
+                </a:lnTo>
+                <a:lnTo>
+                  <a:pt x="1293944" y="3487772"/>
+                </a:lnTo>
+                <a:lnTo>
+                  <a:pt x="1264537" y="3487772"/>
+                </a:lnTo>
+                <a:lnTo>
+                  <a:pt x="1235129" y="3487772"/>
+                </a:lnTo>
+                <a:lnTo>
+                  <a:pt x="1205721" y="3487772"/>
+                </a:lnTo>
+                <a:lnTo>
+                  <a:pt x="1176313" y="3487772"/>
+                </a:lnTo>
+                <a:lnTo>
+                  <a:pt x="1146905" y="3487772"/>
+                </a:lnTo>
+                <a:lnTo>
+                  <a:pt x="1117497" y="3487772"/>
+                </a:lnTo>
+                <a:lnTo>
+                  <a:pt x="1088090" y="3487772"/>
+                </a:lnTo>
+                <a:lnTo>
+                  <a:pt x="1058682" y="3487772"/>
+                </a:lnTo>
+                <a:lnTo>
+                  <a:pt x="1029274" y="3487772"/>
+                </a:lnTo>
+                <a:lnTo>
+                  <a:pt x="999866" y="3487772"/>
+                </a:lnTo>
+                <a:lnTo>
+                  <a:pt x="970458" y="3487772"/>
+                </a:lnTo>
+                <a:lnTo>
+                  <a:pt x="941050" y="3487772"/>
+                </a:lnTo>
+                <a:lnTo>
+                  <a:pt x="911643" y="3487772"/>
+                </a:lnTo>
+                <a:lnTo>
+                  <a:pt x="882235" y="3487772"/>
+                </a:lnTo>
+                <a:lnTo>
+                  <a:pt x="852827" y="3487772"/>
+                </a:lnTo>
+                <a:lnTo>
+                  <a:pt x="823419" y="3487772"/>
+                </a:lnTo>
+                <a:lnTo>
+                  <a:pt x="794011" y="3487772"/>
+                </a:lnTo>
+                <a:lnTo>
+                  <a:pt x="764603" y="3487772"/>
+                </a:lnTo>
+                <a:lnTo>
+                  <a:pt x="735195" y="3487772"/>
+                </a:lnTo>
+                <a:lnTo>
+                  <a:pt x="705788" y="3487772"/>
+                </a:lnTo>
+                <a:lnTo>
+                  <a:pt x="676380" y="3487772"/>
+                </a:lnTo>
+                <a:lnTo>
+                  <a:pt x="646972" y="3487772"/>
+                </a:lnTo>
+                <a:lnTo>
+                  <a:pt x="617564" y="3487772"/>
+                </a:lnTo>
+                <a:lnTo>
+                  <a:pt x="588156" y="3487772"/>
+                </a:lnTo>
+                <a:lnTo>
+                  <a:pt x="558748" y="3487772"/>
+                </a:lnTo>
+                <a:lnTo>
+                  <a:pt x="529341" y="3487772"/>
+                </a:lnTo>
+                <a:lnTo>
+                  <a:pt x="499933" y="3487772"/>
+                </a:lnTo>
+                <a:lnTo>
+                  <a:pt x="470525" y="3487772"/>
+                </a:lnTo>
+                <a:lnTo>
+                  <a:pt x="441117" y="3487772"/>
+                </a:lnTo>
+                <a:lnTo>
+                  <a:pt x="411709" y="3487772"/>
+                </a:lnTo>
+                <a:lnTo>
+                  <a:pt x="382301" y="3487772"/>
+                </a:lnTo>
+                <a:lnTo>
+                  <a:pt x="352894" y="3487772"/>
+                </a:lnTo>
+                <a:lnTo>
+                  <a:pt x="323486" y="3487772"/>
+                </a:lnTo>
+                <a:lnTo>
+                  <a:pt x="294078" y="3487772"/>
+                </a:lnTo>
+                <a:lnTo>
+                  <a:pt x="264670" y="3487772"/>
+                </a:lnTo>
+                <a:lnTo>
+                  <a:pt x="235262" y="3487772"/>
+                </a:lnTo>
+                <a:lnTo>
+                  <a:pt x="205854" y="3487772"/>
+                </a:lnTo>
+                <a:lnTo>
+                  <a:pt x="176447" y="3487772"/>
+                </a:lnTo>
+                <a:lnTo>
+                  <a:pt x="147039" y="3487772"/>
+                </a:lnTo>
+                <a:lnTo>
+                  <a:pt x="117631" y="3487772"/>
+                </a:lnTo>
+                <a:lnTo>
+                  <a:pt x="88223" y="3487772"/>
+                </a:lnTo>
+                <a:lnTo>
+                  <a:pt x="58815" y="3487772"/>
+                </a:lnTo>
+                <a:lnTo>
+                  <a:pt x="29407" y="3487772"/>
+                </a:lnTo>
+                <a:lnTo>
+                  <a:pt x="0" y="3487772"/>
+                </a:lnTo>
+                <a:close/>
+              </a:path>
+            </a:pathLst>
+          </a:custGeom>
+          <a:solidFill>
+            <a:srgbClr val="8EDBD4">
+              <a:alpha val="25000"/>
+            </a:srgbClr>
+          </a:solidFill>
+          <a:ln w="10160">
+            <a:solidFill>
+              <a:srgbClr val="8EDBD4">
+                <a:alpha val="25000"/>
+              </a:srgbClr>
+            </a:solidFill>
+          </a:ln>
+          <a:effectLst/>
+        </p:spPr>
         <p:txBody>
           <a:bodyPr rtlCol="0" anchor="ctr"/>
           <a:lstStyle/>
@@ -3168,24 +5369,702 @@
       </p:sp>
       <p:sp>
         <p:nvSpPr>
-          <p:cNvPr id="4" name="ellipse 2" descr="sci-ppt:obj-002"/>
+          <p:cNvPr id="39" name="A-E03 polygon 37" descr="sci-ppt:o037"/>
           <p:cNvSpPr/>
           <p:nvPr/>
         </p:nvSpPr>
         <p:spPr>
           <a:xfrm>
-            <a:off x="1463040" y="1316736"/>
-            <a:ext cx="658368" cy="658368"/>
-          </a:xfrm>
-          <a:prstGeom prst="ellipse">
+            <a:off x="914400" y="1541428"/>
+            <a:ext cx="5852160" cy="3344821"/>
+          </a:xfrm>
+          <a:custGeom>
+            <a:avLst/>
+            <a:gdLst/>
+            <a:ahLst/>
+            <a:cxnLst/>
+            <a:rect l="l" t="t" r="r" b="b"/>
+            <a:pathLst>
+              <a:path w="5852160" h="3344821">
+                <a:moveTo>
+                  <a:pt x="0" y="0"/>
+                </a:moveTo>
+                <a:lnTo>
+                  <a:pt x="29407" y="630464"/>
+                </a:lnTo>
+                <a:lnTo>
+                  <a:pt x="58815" y="779752"/>
+                </a:lnTo>
+                <a:lnTo>
+                  <a:pt x="88223" y="871860"/>
+                </a:lnTo>
+                <a:lnTo>
+                  <a:pt x="117631" y="940743"/>
+                </a:lnTo>
+                <a:lnTo>
+                  <a:pt x="147039" y="997175"/>
+                </a:lnTo>
+                <a:lnTo>
+                  <a:pt x="176447" y="1045903"/>
+                </a:lnTo>
+                <a:lnTo>
+                  <a:pt x="205854" y="1089414"/>
+                </a:lnTo>
+                <a:lnTo>
+                  <a:pt x="235262" y="1129159"/>
+                </a:lnTo>
+                <a:lnTo>
+                  <a:pt x="264670" y="1166049"/>
+                </a:lnTo>
+                <a:lnTo>
+                  <a:pt x="294078" y="1200693"/>
+                </a:lnTo>
+                <a:lnTo>
+                  <a:pt x="323486" y="1233513"/>
+                </a:lnTo>
+                <a:lnTo>
+                  <a:pt x="352894" y="1264814"/>
+                </a:lnTo>
+                <a:lnTo>
+                  <a:pt x="382301" y="1294824"/>
+                </a:lnTo>
+                <a:lnTo>
+                  <a:pt x="411709" y="1323717"/>
+                </a:lnTo>
+                <a:lnTo>
+                  <a:pt x="441117" y="1351627"/>
+                </a:lnTo>
+                <a:lnTo>
+                  <a:pt x="470525" y="1378663"/>
+                </a:lnTo>
+                <a:lnTo>
+                  <a:pt x="499933" y="1404912"/>
+                </a:lnTo>
+                <a:lnTo>
+                  <a:pt x="529341" y="1430445"/>
+                </a:lnTo>
+                <a:lnTo>
+                  <a:pt x="558748" y="1455324"/>
+                </a:lnTo>
+                <a:lnTo>
+                  <a:pt x="588156" y="1479598"/>
+                </a:lnTo>
+                <a:lnTo>
+                  <a:pt x="617564" y="1503312"/>
+                </a:lnTo>
+                <a:lnTo>
+                  <a:pt x="646972" y="1526502"/>
+                </a:lnTo>
+                <a:lnTo>
+                  <a:pt x="676380" y="1549201"/>
+                </a:lnTo>
+                <a:lnTo>
+                  <a:pt x="705788" y="1571439"/>
+                </a:lnTo>
+                <a:lnTo>
+                  <a:pt x="735195" y="1593240"/>
+                </a:lnTo>
+                <a:lnTo>
+                  <a:pt x="764603" y="1614628"/>
+                </a:lnTo>
+                <a:lnTo>
+                  <a:pt x="794011" y="1635622"/>
+                </a:lnTo>
+                <a:lnTo>
+                  <a:pt x="823419" y="1656243"/>
+                </a:lnTo>
+                <a:lnTo>
+                  <a:pt x="852827" y="1676506"/>
+                </a:lnTo>
+                <a:lnTo>
+                  <a:pt x="882235" y="1696427"/>
+                </a:lnTo>
+                <a:lnTo>
+                  <a:pt x="911643" y="1716019"/>
+                </a:lnTo>
+                <a:lnTo>
+                  <a:pt x="941050" y="1735297"/>
+                </a:lnTo>
+                <a:lnTo>
+                  <a:pt x="970458" y="1754272"/>
+                </a:lnTo>
+                <a:lnTo>
+                  <a:pt x="999866" y="1772956"/>
+                </a:lnTo>
+                <a:lnTo>
+                  <a:pt x="1029274" y="1791358"/>
+                </a:lnTo>
+                <a:lnTo>
+                  <a:pt x="1058682" y="1809489"/>
+                </a:lnTo>
+                <a:lnTo>
+                  <a:pt x="1088090" y="1827358"/>
+                </a:lnTo>
+                <a:lnTo>
+                  <a:pt x="1117497" y="1844973"/>
+                </a:lnTo>
+                <a:lnTo>
+                  <a:pt x="1146905" y="1862343"/>
+                </a:lnTo>
+                <a:lnTo>
+                  <a:pt x="1176313" y="1879475"/>
+                </a:lnTo>
+                <a:lnTo>
+                  <a:pt x="1205721" y="1896376"/>
+                </a:lnTo>
+                <a:lnTo>
+                  <a:pt x="1235129" y="1913054"/>
+                </a:lnTo>
+                <a:lnTo>
+                  <a:pt x="1264537" y="1929514"/>
+                </a:lnTo>
+                <a:lnTo>
+                  <a:pt x="1293944" y="1945762"/>
+                </a:lnTo>
+                <a:lnTo>
+                  <a:pt x="1323352" y="1961806"/>
+                </a:lnTo>
+                <a:lnTo>
+                  <a:pt x="1352760" y="1977650"/>
+                </a:lnTo>
+                <a:lnTo>
+                  <a:pt x="1382168" y="1993300"/>
+                </a:lnTo>
+                <a:lnTo>
+                  <a:pt x="1411576" y="2008760"/>
+                </a:lnTo>
+                <a:lnTo>
+                  <a:pt x="1440984" y="2024036"/>
+                </a:lnTo>
+                <a:lnTo>
+                  <a:pt x="1470391" y="2039132"/>
+                </a:lnTo>
+                <a:lnTo>
+                  <a:pt x="1499799" y="2054053"/>
+                </a:lnTo>
+                <a:lnTo>
+                  <a:pt x="1529207" y="2068802"/>
+                </a:lnTo>
+                <a:lnTo>
+                  <a:pt x="1558615" y="2083385"/>
+                </a:lnTo>
+                <a:lnTo>
+                  <a:pt x="1588023" y="2097806"/>
+                </a:lnTo>
+                <a:lnTo>
+                  <a:pt x="1617431" y="2112067"/>
+                </a:lnTo>
+                <a:lnTo>
+                  <a:pt x="1646838" y="2126172"/>
+                </a:lnTo>
+                <a:lnTo>
+                  <a:pt x="1676246" y="2140126"/>
+                </a:lnTo>
+                <a:lnTo>
+                  <a:pt x="1705654" y="2153931"/>
+                </a:lnTo>
+                <a:lnTo>
+                  <a:pt x="1735062" y="2167591"/>
+                </a:lnTo>
+                <a:lnTo>
+                  <a:pt x="1764470" y="2181108"/>
+                </a:lnTo>
+                <a:lnTo>
+                  <a:pt x="1793878" y="2194487"/>
+                </a:lnTo>
+                <a:lnTo>
+                  <a:pt x="1823286" y="2207729"/>
+                </a:lnTo>
+                <a:lnTo>
+                  <a:pt x="1852693" y="2220839"/>
+                </a:lnTo>
+                <a:lnTo>
+                  <a:pt x="1882101" y="2233818"/>
+                </a:lnTo>
+                <a:lnTo>
+                  <a:pt x="1911509" y="2246668"/>
+                </a:lnTo>
+                <a:lnTo>
+                  <a:pt x="1940917" y="2259394"/>
+                </a:lnTo>
+                <a:lnTo>
+                  <a:pt x="1970325" y="2271997"/>
+                </a:lnTo>
+                <a:lnTo>
+                  <a:pt x="1999733" y="2284480"/>
+                </a:lnTo>
+                <a:lnTo>
+                  <a:pt x="2029140" y="2296844"/>
+                </a:lnTo>
+                <a:lnTo>
+                  <a:pt x="2058548" y="2309093"/>
+                </a:lnTo>
+                <a:lnTo>
+                  <a:pt x="2087956" y="2321229"/>
+                </a:lnTo>
+                <a:lnTo>
+                  <a:pt x="2117364" y="2333253"/>
+                </a:lnTo>
+                <a:lnTo>
+                  <a:pt x="2146772" y="2345167"/>
+                </a:lnTo>
+                <a:lnTo>
+                  <a:pt x="2176180" y="2356975"/>
+                </a:lnTo>
+                <a:lnTo>
+                  <a:pt x="2205587" y="2368677"/>
+                </a:lnTo>
+                <a:lnTo>
+                  <a:pt x="2234995" y="2380276"/>
+                </a:lnTo>
+                <a:lnTo>
+                  <a:pt x="2264403" y="2391773"/>
+                </a:lnTo>
+                <a:lnTo>
+                  <a:pt x="2293811" y="2403170"/>
+                </a:lnTo>
+                <a:lnTo>
+                  <a:pt x="2323219" y="2414470"/>
+                </a:lnTo>
+                <a:lnTo>
+                  <a:pt x="2352627" y="2425673"/>
+                </a:lnTo>
+                <a:lnTo>
+                  <a:pt x="2382034" y="2436781"/>
+                </a:lnTo>
+                <a:lnTo>
+                  <a:pt x="2411442" y="2447797"/>
+                </a:lnTo>
+                <a:lnTo>
+                  <a:pt x="2440850" y="2458721"/>
+                </a:lnTo>
+                <a:lnTo>
+                  <a:pt x="2470258" y="2469555"/>
+                </a:lnTo>
+                <a:lnTo>
+                  <a:pt x="2499666" y="2480300"/>
+                </a:lnTo>
+                <a:lnTo>
+                  <a:pt x="2529074" y="2490959"/>
+                </a:lnTo>
+                <a:lnTo>
+                  <a:pt x="2558482" y="2501532"/>
+                </a:lnTo>
+                <a:lnTo>
+                  <a:pt x="2587889" y="2512021"/>
+                </a:lnTo>
+                <a:lnTo>
+                  <a:pt x="2617297" y="2522427"/>
+                </a:lnTo>
+                <a:lnTo>
+                  <a:pt x="2646705" y="2532752"/>
+                </a:lnTo>
+                <a:lnTo>
+                  <a:pt x="2676113" y="2542996"/>
+                </a:lnTo>
+                <a:lnTo>
+                  <a:pt x="2705521" y="2553162"/>
+                </a:lnTo>
+                <a:lnTo>
+                  <a:pt x="2734929" y="2563250"/>
+                </a:lnTo>
+                <a:lnTo>
+                  <a:pt x="2764336" y="2573261"/>
+                </a:lnTo>
+                <a:lnTo>
+                  <a:pt x="2793744" y="2583197"/>
+                </a:lnTo>
+                <a:lnTo>
+                  <a:pt x="2823152" y="2593058"/>
+                </a:lnTo>
+                <a:lnTo>
+                  <a:pt x="2852560" y="2602847"/>
+                </a:lnTo>
+                <a:lnTo>
+                  <a:pt x="2881968" y="2612563"/>
+                </a:lnTo>
+                <a:lnTo>
+                  <a:pt x="2911376" y="2622209"/>
+                </a:lnTo>
+                <a:lnTo>
+                  <a:pt x="2940783" y="2631784"/>
+                </a:lnTo>
+                <a:lnTo>
+                  <a:pt x="2970191" y="2641291"/>
+                </a:lnTo>
+                <a:lnTo>
+                  <a:pt x="2999599" y="2650730"/>
+                </a:lnTo>
+                <a:lnTo>
+                  <a:pt x="3029007" y="2660102"/>
+                </a:lnTo>
+                <a:lnTo>
+                  <a:pt x="3058415" y="2669407"/>
+                </a:lnTo>
+                <a:lnTo>
+                  <a:pt x="3087823" y="2678648"/>
+                </a:lnTo>
+                <a:lnTo>
+                  <a:pt x="3117230" y="2687825"/>
+                </a:lnTo>
+                <a:lnTo>
+                  <a:pt x="3146638" y="2696938"/>
+                </a:lnTo>
+                <a:lnTo>
+                  <a:pt x="3176046" y="2705989"/>
+                </a:lnTo>
+                <a:lnTo>
+                  <a:pt x="3205454" y="2714979"/>
+                </a:lnTo>
+                <a:lnTo>
+                  <a:pt x="3234862" y="2723908"/>
+                </a:lnTo>
+                <a:lnTo>
+                  <a:pt x="3264270" y="2732777"/>
+                </a:lnTo>
+                <a:lnTo>
+                  <a:pt x="3293677" y="2741587"/>
+                </a:lnTo>
+                <a:lnTo>
+                  <a:pt x="3323085" y="2750338"/>
+                </a:lnTo>
+                <a:lnTo>
+                  <a:pt x="3352493" y="2759032"/>
+                </a:lnTo>
+                <a:lnTo>
+                  <a:pt x="3381901" y="2767670"/>
+                </a:lnTo>
+                <a:lnTo>
+                  <a:pt x="3411309" y="2776251"/>
+                </a:lnTo>
+                <a:lnTo>
+                  <a:pt x="3440717" y="2784777"/>
+                </a:lnTo>
+                <a:lnTo>
+                  <a:pt x="3470125" y="2793249"/>
+                </a:lnTo>
+                <a:lnTo>
+                  <a:pt x="3499532" y="2801667"/>
+                </a:lnTo>
+                <a:lnTo>
+                  <a:pt x="3528940" y="2810031"/>
+                </a:lnTo>
+                <a:lnTo>
+                  <a:pt x="3558348" y="2818343"/>
+                </a:lnTo>
+                <a:lnTo>
+                  <a:pt x="3587756" y="2826603"/>
+                </a:lnTo>
+                <a:lnTo>
+                  <a:pt x="3617164" y="2834812"/>
+                </a:lnTo>
+                <a:lnTo>
+                  <a:pt x="3646572" y="2842971"/>
+                </a:lnTo>
+                <a:lnTo>
+                  <a:pt x="3675979" y="2851079"/>
+                </a:lnTo>
+                <a:lnTo>
+                  <a:pt x="3705387" y="2859138"/>
+                </a:lnTo>
+                <a:lnTo>
+                  <a:pt x="3734795" y="2867149"/>
+                </a:lnTo>
+                <a:lnTo>
+                  <a:pt x="3764203" y="2875111"/>
+                </a:lnTo>
+                <a:lnTo>
+                  <a:pt x="3793611" y="2883026"/>
+                </a:lnTo>
+                <a:lnTo>
+                  <a:pt x="3823019" y="2890893"/>
+                </a:lnTo>
+                <a:lnTo>
+                  <a:pt x="3852426" y="2898715"/>
+                </a:lnTo>
+                <a:lnTo>
+                  <a:pt x="3881834" y="2906490"/>
+                </a:lnTo>
+                <a:lnTo>
+                  <a:pt x="3911242" y="2914220"/>
+                </a:lnTo>
+                <a:lnTo>
+                  <a:pt x="3940650" y="2921905"/>
+                </a:lnTo>
+                <a:lnTo>
+                  <a:pt x="3970058" y="2929546"/>
+                </a:lnTo>
+                <a:lnTo>
+                  <a:pt x="3999466" y="2937144"/>
+                </a:lnTo>
+                <a:lnTo>
+                  <a:pt x="4028873" y="2944697"/>
+                </a:lnTo>
+                <a:lnTo>
+                  <a:pt x="4058281" y="2952208"/>
+                </a:lnTo>
+                <a:lnTo>
+                  <a:pt x="4087689" y="2959677"/>
+                </a:lnTo>
+                <a:lnTo>
+                  <a:pt x="4117097" y="2967104"/>
+                </a:lnTo>
+                <a:lnTo>
+                  <a:pt x="4146505" y="2974490"/>
+                </a:lnTo>
+                <a:lnTo>
+                  <a:pt x="4175913" y="2981834"/>
+                </a:lnTo>
+                <a:lnTo>
+                  <a:pt x="4205321" y="2989138"/>
+                </a:lnTo>
+                <a:lnTo>
+                  <a:pt x="4234728" y="2996403"/>
+                </a:lnTo>
+                <a:lnTo>
+                  <a:pt x="4264136" y="3003627"/>
+                </a:lnTo>
+                <a:lnTo>
+                  <a:pt x="4293544" y="3010813"/>
+                </a:lnTo>
+                <a:lnTo>
+                  <a:pt x="4322952" y="3017959"/>
+                </a:lnTo>
+                <a:lnTo>
+                  <a:pt x="4352360" y="3025068"/>
+                </a:lnTo>
+                <a:lnTo>
+                  <a:pt x="4381768" y="3032138"/>
+                </a:lnTo>
+                <a:lnTo>
+                  <a:pt x="4411175" y="3039172"/>
+                </a:lnTo>
+                <a:lnTo>
+                  <a:pt x="4440583" y="3046167"/>
+                </a:lnTo>
+                <a:lnTo>
+                  <a:pt x="4469991" y="3053127"/>
+                </a:lnTo>
+                <a:lnTo>
+                  <a:pt x="4499399" y="3060050"/>
+                </a:lnTo>
+                <a:lnTo>
+                  <a:pt x="4528807" y="3066937"/>
+                </a:lnTo>
+                <a:lnTo>
+                  <a:pt x="4558215" y="3073788"/>
+                </a:lnTo>
+                <a:lnTo>
+                  <a:pt x="4587622" y="3080604"/>
+                </a:lnTo>
+                <a:lnTo>
+                  <a:pt x="4617030" y="3087386"/>
+                </a:lnTo>
+                <a:lnTo>
+                  <a:pt x="4646438" y="3094133"/>
+                </a:lnTo>
+                <a:lnTo>
+                  <a:pt x="4675846" y="3100846"/>
+                </a:lnTo>
+                <a:lnTo>
+                  <a:pt x="4705254" y="3107525"/>
+                </a:lnTo>
+                <a:lnTo>
+                  <a:pt x="4734662" y="3114170"/>
+                </a:lnTo>
+                <a:lnTo>
+                  <a:pt x="4764069" y="3120783"/>
+                </a:lnTo>
+                <a:lnTo>
+                  <a:pt x="4793477" y="3127362"/>
+                </a:lnTo>
+                <a:lnTo>
+                  <a:pt x="4822885" y="3133910"/>
+                </a:lnTo>
+                <a:lnTo>
+                  <a:pt x="4852293" y="3140425"/>
+                </a:lnTo>
+                <a:lnTo>
+                  <a:pt x="4881701" y="3146908"/>
+                </a:lnTo>
+                <a:lnTo>
+                  <a:pt x="4911109" y="3153360"/>
+                </a:lnTo>
+                <a:lnTo>
+                  <a:pt x="4940516" y="3159780"/>
+                </a:lnTo>
+                <a:lnTo>
+                  <a:pt x="4969924" y="3166170"/>
+                </a:lnTo>
+                <a:lnTo>
+                  <a:pt x="4999332" y="3172529"/>
+                </a:lnTo>
+                <a:lnTo>
+                  <a:pt x="5028740" y="3178858"/>
+                </a:lnTo>
+                <a:lnTo>
+                  <a:pt x="5058148" y="3185156"/>
+                </a:lnTo>
+                <a:lnTo>
+                  <a:pt x="5087556" y="3191425"/>
+                </a:lnTo>
+                <a:lnTo>
+                  <a:pt x="5116964" y="3197665"/>
+                </a:lnTo>
+                <a:lnTo>
+                  <a:pt x="5146371" y="3203875"/>
+                </a:lnTo>
+                <a:lnTo>
+                  <a:pt x="5175779" y="3210056"/>
+                </a:lnTo>
+                <a:lnTo>
+                  <a:pt x="5205187" y="3216209"/>
+                </a:lnTo>
+                <a:lnTo>
+                  <a:pt x="5234595" y="3222333"/>
+                </a:lnTo>
+                <a:lnTo>
+                  <a:pt x="5264003" y="3228430"/>
+                </a:lnTo>
+                <a:lnTo>
+                  <a:pt x="5293411" y="3234498"/>
+                </a:lnTo>
+                <a:lnTo>
+                  <a:pt x="5322818" y="3240539"/>
+                </a:lnTo>
+                <a:lnTo>
+                  <a:pt x="5352226" y="3246552"/>
+                </a:lnTo>
+                <a:lnTo>
+                  <a:pt x="5381634" y="3252538"/>
+                </a:lnTo>
+                <a:lnTo>
+                  <a:pt x="5411042" y="3258498"/>
+                </a:lnTo>
+                <a:lnTo>
+                  <a:pt x="5440450" y="3264430"/>
+                </a:lnTo>
+                <a:lnTo>
+                  <a:pt x="5469858" y="3270337"/>
+                </a:lnTo>
+                <a:lnTo>
+                  <a:pt x="5499265" y="3276217"/>
+                </a:lnTo>
+                <a:lnTo>
+                  <a:pt x="5528673" y="3282071"/>
+                </a:lnTo>
+                <a:lnTo>
+                  <a:pt x="5558081" y="3287900"/>
+                </a:lnTo>
+                <a:lnTo>
+                  <a:pt x="5587489" y="3293703"/>
+                </a:lnTo>
+                <a:lnTo>
+                  <a:pt x="5616897" y="3299481"/>
+                </a:lnTo>
+                <a:lnTo>
+                  <a:pt x="5646305" y="3305234"/>
+                </a:lnTo>
+                <a:lnTo>
+                  <a:pt x="5675712" y="3310962"/>
+                </a:lnTo>
+                <a:lnTo>
+                  <a:pt x="5705120" y="3316665"/>
+                </a:lnTo>
+                <a:lnTo>
+                  <a:pt x="5734528" y="3322344"/>
+                </a:lnTo>
+                <a:lnTo>
+                  <a:pt x="5763936" y="3327999"/>
+                </a:lnTo>
+                <a:lnTo>
+                  <a:pt x="5793344" y="3333630"/>
+                </a:lnTo>
+                <a:lnTo>
+                  <a:pt x="5822752" y="3339237"/>
+                </a:lnTo>
+                <a:lnTo>
+                  <a:pt x="5852160" y="3344821"/>
+                </a:lnTo>
+              </a:path>
+            </a:pathLst>
+          </a:custGeom>
+          <a:noFill/>
+          <a:ln w="40640">
+            <a:solidFill>
+              <a:srgbClr val="8EDBD4"/>
+            </a:solidFill>
+          </a:ln>
+          <a:effectLst/>
+        </p:spPr>
+        <p:txBody>
+          <a:bodyPr rtlCol="0" anchor="ctr"/>
+          <a:lstStyle/>
+          <a:p>
+            <a:pPr algn="ctr"/>
+          </a:p>
+        </p:txBody>
+      </p:sp>
+      <p:sp>
+        <p:nvSpPr>
+          <p:cNvPr id="40" name="A-E03 text 38" descr="sci-ppt:o038"/>
+          <p:cNvSpPr txBox="1"/>
+          <p:nvPr/>
+        </p:nvSpPr>
+        <p:spPr>
+          <a:xfrm>
+            <a:off x="2157984" y="1736828"/>
+            <a:ext cx="4023360" cy="223900"/>
+          </a:xfrm>
+          <a:prstGeom prst="rect">
+            <a:avLst/>
+          </a:prstGeom>
+          <a:noFill/>
+          <a:effectLst/>
+        </p:spPr>
+        <p:txBody>
+          <a:bodyPr wrap="none" lIns="18288" rIns="18288" tIns="18288" bIns="18288" anchor="t">
+            <a:spAutoFit/>
+          </a:bodyPr>
+          <a:lstStyle/>
+          <a:p>
+            <a:pPr algn="l">
+              <a:spcAft>
+                <a:spcPts val="0"/>
+              </a:spcAft>
+            </a:pPr>
+            <a:r>
+              <a:rPr sz="1150" b="0" i="0">
+                <a:solidFill>
+                  <a:srgbClr val="F2B880"/>
+                </a:solidFill>
+                <a:latin typeface="Arial"/>
+              </a:rPr>
+              <a:t>area to ∞ = 1.0831  ⇒  pₑₗ = 2G_g·area = 43.326 kPa</a:t>
+            </a:r>
+          </a:p>
+        </p:txBody>
+      </p:sp>
+      <p:sp>
+        <p:nvSpPr>
+          <p:cNvPr id="41" name="A-E03 round_rect 39" descr="sci-ppt:o039"/>
+          <p:cNvSpPr/>
+          <p:nvPr/>
+        </p:nvSpPr>
+        <p:spPr>
+          <a:xfrm>
+            <a:off x="7040880" y="1371600"/>
+            <a:ext cx="4800600" cy="3657600"/>
+          </a:xfrm>
+          <a:prstGeom prst="roundRect">
             <a:avLst/>
           </a:prstGeom>
           <a:solidFill>
             <a:srgbClr val="213E4B"/>
           </a:solidFill>
-          <a:ln w="17780">
+          <a:ln w="20320">
             <a:solidFill>
-              <a:srgbClr val="B4C7D2"/>
+              <a:srgbClr val="8EDBD4"/>
             </a:solidFill>
           </a:ln>
           <a:effectLst/>
@@ -3198,40 +6077,16 @@
           </a:p>
         </p:txBody>
       </p:sp>
-      <p:cxnSp>
-        <p:nvCxnSpPr>
-          <p:cNvPr id="5" name="arrow 3" descr="sci-ppt:obj-003"/>
-          <p:cNvCxnSpPr/>
-          <p:nvPr/>
-        </p:nvCxnSpPr>
-        <p:spPr>
-          <a:xfrm>
-            <a:off x="1792224" y="1645920"/>
-            <a:ext cx="329184" cy="0"/>
-          </a:xfrm>
-          <a:prstGeom prst="line">
-            <a:avLst/>
-          </a:prstGeom>
-          <a:ln w="21590">
-            <a:solidFill>
-              <a:srgbClr val="8EDBD4"/>
-            </a:solidFill>
-            <a:headEnd type="none" w="med" len="med"/>
-            <a:tailEnd type="triangle" w="med" len="med"/>
-          </a:ln>
-          <a:effectLst/>
-        </p:spPr>
-      </p:cxnSp>
-      <p:sp>
-        <p:nvSpPr>
-          <p:cNvPr id="6" name="text 4" descr="sci-ppt:obj-004"/>
+      <p:sp>
+        <p:nvSpPr>
+          <p:cNvPr id="42" name="A-E03 text 40" descr="sci-ppt:o040"/>
           <p:cNvSpPr txBox="1"/>
           <p:nvPr/>
         </p:nvSpPr>
         <p:spPr>
           <a:xfrm>
-            <a:off x="1755648" y="1271016"/>
-            <a:ext cx="1097280" cy="310896"/>
+            <a:off x="7150608" y="1426464"/>
+            <a:ext cx="4581144" cy="254889"/>
           </a:xfrm>
           <a:prstGeom prst="rect">
             <a:avLst/>
@@ -3240,7 +6095,7 @@
           <a:effectLst/>
         </p:spPr>
         <p:txBody>
-          <a:bodyPr wrap="none" lIns="0" rIns="0" tIns="0" bIns="0" anchor="ctr">
+          <a:bodyPr wrap="none" lIns="18288" rIns="18288" tIns="18288" bIns="18288" anchor="t">
             <a:spAutoFit/>
           </a:bodyPr>
           <a:lstStyle/>
@@ -3251,51 +6106,67 @@
               </a:spcAft>
             </a:pPr>
             <a:r>
-              <a:rPr sz="1296" b="0" i="0">
+              <a:rPr sz="1350" b="1" i="0">
+                <a:solidFill>
+                  <a:srgbClr val="8EDBD4"/>
+                </a:solidFill>
+                <a:latin typeface="Arial"/>
+              </a:rPr>
+              <a:t>Radial force balance</a:t>
+            </a:r>
+          </a:p>
+        </p:txBody>
+      </p:sp>
+      <p:sp>
+        <p:nvSpPr>
+          <p:cNvPr id="43" name="A-E03 text 41" descr="sci-ppt:o041"/>
+          <p:cNvSpPr txBox="1"/>
+          <p:nvPr/>
+        </p:nvSpPr>
+        <p:spPr>
+          <a:xfrm>
+            <a:off x="7178040" y="1828800"/>
+            <a:ext cx="4572000" cy="247142"/>
+          </a:xfrm>
+          <a:prstGeom prst="rect">
+            <a:avLst/>
+          </a:prstGeom>
+          <a:noFill/>
+          <a:effectLst/>
+        </p:spPr>
+        <p:txBody>
+          <a:bodyPr wrap="none" lIns="18288" rIns="18288" tIns="18288" bIns="18288" anchor="t">
+            <a:spAutoFit/>
+          </a:bodyPr>
+          <a:lstStyle/>
+          <a:p>
+            <a:pPr algn="l">
+              <a:spcAft>
+                <a:spcPts val="0"/>
+              </a:spcAft>
+            </a:pPr>
+            <a:r>
+              <a:rPr sz="1300" b="1" i="0">
                 <a:solidFill>
                   <a:srgbClr val="E7F0F3"/>
                 </a:solidFill>
                 <a:latin typeface="Arial"/>
               </a:rPr>
-              <a:t>Rref</a:t>
-            </a:r>
-          </a:p>
-        </p:txBody>
-      </p:sp>
-      <p:cxnSp>
-        <p:nvCxnSpPr>
-          <p:cNvPr id="7" name="arrow 5" descr="sci-ppt:obj-005"/>
-          <p:cNvCxnSpPr/>
-          <p:nvPr/>
-        </p:nvCxnSpPr>
-        <p:spPr>
-          <a:xfrm>
-            <a:off x="1792224" y="1645920"/>
-            <a:ext cx="517262" cy="517262"/>
-          </a:xfrm>
-          <a:prstGeom prst="line">
-            <a:avLst/>
-          </a:prstGeom>
-          <a:ln w="21590">
-            <a:solidFill>
-              <a:srgbClr val="8EDBD4"/>
-            </a:solidFill>
-            <a:headEnd type="none" w="med" len="med"/>
-            <a:tailEnd type="triangle" w="med" len="med"/>
-          </a:ln>
-          <a:effectLst/>
-        </p:spPr>
-      </p:cxnSp>
-      <p:sp>
-        <p:nvSpPr>
-          <p:cNvPr id="8" name="text 6" descr="sci-ppt:obj-006"/>
+              <a:t>dTᵣᵣ/dr = (2/r)(T_θθ − Tᵣᵣ)</a:t>
+            </a:r>
+          </a:p>
+        </p:txBody>
+      </p:sp>
+      <p:sp>
+        <p:nvSpPr>
+          <p:cNvPr id="44" name="A-E03 text 42" descr="sci-ppt:o042"/>
           <p:cNvSpPr txBox="1"/>
           <p:nvPr/>
         </p:nvSpPr>
         <p:spPr>
           <a:xfrm>
-            <a:off x="2304288" y="2139696"/>
-            <a:ext cx="822960" cy="310896"/>
+            <a:off x="7178040" y="2331720"/>
+            <a:ext cx="4572000" cy="231648"/>
           </a:xfrm>
           <a:prstGeom prst="rect">
             <a:avLst/>
@@ -3304,7 +6175,7 @@
           <a:effectLst/>
         </p:spPr>
         <p:txBody>
-          <a:bodyPr wrap="none" lIns="0" rIns="0" tIns="0" bIns="0" anchor="ctr">
+          <a:bodyPr wrap="none" lIns="18288" rIns="18288" tIns="18288" bIns="18288" anchor="t">
             <a:spAutoFit/>
           </a:bodyPr>
           <a:lstStyle/>
@@ -3315,113 +6186,163 @@
               </a:spcAft>
             </a:pPr>
             <a:r>
-              <a:rPr sz="1296" b="0" i="0">
+              <a:rPr sz="1200" b="1" i="0">
+                <a:solidFill>
+                  <a:srgbClr val="F2B880"/>
+                </a:solidFill>
+                <a:latin typeface="Arial"/>
+              </a:rPr>
+              <a:t>Tᵣᵣ(∞) = −p_∞,   Tᵣᵣ(R) = −p_b + 2σ/R</a:t>
+            </a:r>
+          </a:p>
+        </p:txBody>
+      </p:sp>
+      <p:sp>
+        <p:nvSpPr>
+          <p:cNvPr id="45" name="A-E03 text 43" descr="sci-ppt:o043"/>
+          <p:cNvSpPr txBox="1"/>
+          <p:nvPr/>
+        </p:nvSpPr>
+        <p:spPr>
+          <a:xfrm>
+            <a:off x="7178040" y="2834640"/>
+            <a:ext cx="4572000" cy="231648"/>
+          </a:xfrm>
+          <a:prstGeom prst="rect">
+            <a:avLst/>
+          </a:prstGeom>
+          <a:noFill/>
+          <a:effectLst/>
+        </p:spPr>
+        <p:txBody>
+          <a:bodyPr wrap="none" lIns="18288" rIns="18288" tIns="18288" bIns="18288" anchor="t">
+            <a:spAutoFit/>
+          </a:bodyPr>
+          <a:lstStyle/>
+          <a:p>
+            <a:pPr algn="l">
+              <a:spcAft>
+                <a:spcPts val="0"/>
+              </a:spcAft>
+            </a:pPr>
+            <a:r>
+              <a:rPr sz="1200" b="1" i="0">
+                <a:solidFill>
+                  <a:srgbClr val="F2B880"/>
+                </a:solidFill>
+                <a:latin typeface="Arial"/>
+              </a:rPr>
+              <a:t>pₑₗ = p_b − p_∞ − 2σ/R = 2G_g ∫_R^∞ [...] dr/r</a:t>
+            </a:r>
+          </a:p>
+        </p:txBody>
+      </p:sp>
+      <p:sp>
+        <p:nvSpPr>
+          <p:cNvPr id="46" name="A-E03 text 44" descr="sci-ppt:o044"/>
+          <p:cNvSpPr txBox="1"/>
+          <p:nvPr/>
+        </p:nvSpPr>
+        <p:spPr>
+          <a:xfrm>
+            <a:off x="7178040" y="3520440"/>
+            <a:ext cx="4572000" cy="417576"/>
+          </a:xfrm>
+          <a:prstGeom prst="rect">
+            <a:avLst/>
+          </a:prstGeom>
+          <a:noFill/>
+          <a:effectLst/>
+        </p:spPr>
+        <p:txBody>
+          <a:bodyPr wrap="none" lIns="18288" rIns="18288" tIns="18288" bIns="18288" anchor="t">
+            <a:spAutoFit/>
+          </a:bodyPr>
+          <a:lstStyle/>
+          <a:p>
+            <a:pPr algn="l">
+              <a:spcAft>
+                <a:spcPts val="0"/>
+              </a:spcAft>
+            </a:pPr>
+            <a:r>
+              <a:rPr sz="1200" b="0" i="0">
+                <a:solidFill>
+                  <a:srgbClr val="B4C7D2"/>
+                </a:solidFill>
+                <a:latin typeface="Arial"/>
+              </a:rPr>
+              <a:t>Integrating the balance from the wall to infinity</a:t>
+            </a:r>
+          </a:p>
+          <a:p>
+            <a:pPr algn="l">
+              <a:spcAft>
+                <a:spcPts val="0"/>
+              </a:spcAft>
+            </a:pPr>
+            <a:r>
+              <a:rPr sz="1200" b="0" i="0">
+                <a:solidFill>
+                  <a:srgbClr val="B4C7D2"/>
+                </a:solidFill>
+                <a:latin typeface="Arial"/>
+              </a:rPr>
+              <a:t>collects all the elastic resistance.</a:t>
+            </a:r>
+          </a:p>
+        </p:txBody>
+      </p:sp>
+      <p:sp>
+        <p:nvSpPr>
+          <p:cNvPr id="47" name="A-E03 text 45" descr="sci-ppt:o045"/>
+          <p:cNvSpPr txBox="1"/>
+          <p:nvPr/>
+        </p:nvSpPr>
+        <p:spPr>
+          <a:xfrm>
+            <a:off x="914400" y="5733288"/>
+            <a:ext cx="10972800" cy="239395"/>
+          </a:xfrm>
+          <a:prstGeom prst="rect">
+            <a:avLst/>
+          </a:prstGeom>
+          <a:noFill/>
+          <a:effectLst/>
+        </p:spPr>
+        <p:txBody>
+          <a:bodyPr wrap="none" lIns="18288" rIns="18288" tIns="18288" bIns="18288" anchor="t">
+            <a:spAutoFit/>
+          </a:bodyPr>
+          <a:lstStyle/>
+          <a:p>
+            <a:pPr algn="l">
+              <a:spcAft>
+                <a:spcPts val="0"/>
+              </a:spcAft>
+            </a:pPr>
+            <a:r>
+              <a:rPr sz="1250" b="0" i="0">
                 <a:solidFill>
                   <a:srgbClr val="E7F0F3"/>
                 </a:solidFill>
                 <a:latin typeface="Arial"/>
               </a:rPr>
-              <a:t>r₀</a:t>
-            </a:r>
-          </a:p>
-        </p:txBody>
-      </p:sp>
-      <p:sp>
-        <p:nvSpPr>
-          <p:cNvPr id="9" name="ellipse 7" descr="sci-ppt:obj-007"/>
-          <p:cNvSpPr/>
-          <p:nvPr/>
-        </p:nvSpPr>
-        <p:spPr>
-          <a:xfrm>
-            <a:off x="4682139" y="750219"/>
-            <a:ext cx="1791401" cy="1791401"/>
-          </a:xfrm>
-          <a:prstGeom prst="ellipse">
-            <a:avLst/>
-          </a:prstGeom>
-          <a:noFill/>
-          <a:ln w="17780">
-            <a:solidFill>
-              <a:srgbClr val="B4C7D2"/>
-            </a:solidFill>
-          </a:ln>
-          <a:effectLst/>
-        </p:spPr>
-        <p:txBody>
-          <a:bodyPr rtlCol="0" anchor="ctr"/>
-          <a:lstStyle/>
-          <a:p>
-            <a:pPr algn="ctr"/>
-          </a:p>
-        </p:txBody>
-      </p:sp>
-      <p:sp>
-        <p:nvSpPr>
-          <p:cNvPr id="10" name="ellipse 8" descr="sci-ppt:obj-008"/>
-          <p:cNvSpPr/>
-          <p:nvPr/>
-        </p:nvSpPr>
-        <p:spPr>
-          <a:xfrm>
-            <a:off x="4864608" y="932688"/>
-            <a:ext cx="1426464" cy="1426464"/>
-          </a:xfrm>
-          <a:prstGeom prst="ellipse">
-            <a:avLst/>
-          </a:prstGeom>
-          <a:solidFill>
-            <a:srgbClr val="213E4B"/>
-          </a:solidFill>
-          <a:ln w="17780">
-            <a:solidFill>
-              <a:srgbClr val="B4C7D2"/>
-            </a:solidFill>
-          </a:ln>
-          <a:effectLst/>
-        </p:spPr>
-        <p:txBody>
-          <a:bodyPr rtlCol="0" anchor="ctr"/>
-          <a:lstStyle/>
-          <a:p>
-            <a:pPr algn="ctr"/>
-          </a:p>
-        </p:txBody>
-      </p:sp>
-      <p:cxnSp>
-        <p:nvCxnSpPr>
-          <p:cNvPr id="11" name="arrow 9" descr="sci-ppt:obj-009"/>
-          <p:cNvCxnSpPr/>
-          <p:nvPr/>
-        </p:nvCxnSpPr>
-        <p:spPr>
-          <a:xfrm>
-            <a:off x="5577840" y="1645920"/>
-            <a:ext cx="713232" cy="0"/>
-          </a:xfrm>
-          <a:prstGeom prst="line">
-            <a:avLst/>
-          </a:prstGeom>
-          <a:ln w="21590">
-            <a:solidFill>
-              <a:srgbClr val="8EDBD4"/>
-            </a:solidFill>
-            <a:headEnd type="none" w="med" len="med"/>
-            <a:tailEnd type="triangle" w="med" len="med"/>
-          </a:ln>
-          <a:effectLst/>
-        </p:spPr>
-      </p:cxnSp>
-      <p:sp>
-        <p:nvSpPr>
-          <p:cNvPr id="12" name="text 10" descr="sci-ppt:obj-010"/>
+              <a:t>The shaded area is the accumulated resistance; later figures evaluate it in closed form.</a:t>
+            </a:r>
+          </a:p>
+        </p:txBody>
+      </p:sp>
+      <p:sp>
+        <p:nvSpPr>
+          <p:cNvPr id="48" name="A-E03 text 46" descr="sci-ppt:o046"/>
           <p:cNvSpPr txBox="1"/>
           <p:nvPr/>
         </p:nvSpPr>
         <p:spPr>
           <a:xfrm>
-            <a:off x="5952744" y="1271016"/>
-            <a:ext cx="640080" cy="310896"/>
+            <a:off x="320040" y="6510528"/>
+            <a:ext cx="11521440" cy="200660"/>
           </a:xfrm>
           <a:prstGeom prst="rect">
             <a:avLst/>
@@ -3430,7 +6351,7 @@
           <a:effectLst/>
         </p:spPr>
         <p:txBody>
-          <a:bodyPr wrap="none" lIns="0" rIns="0" tIns="0" bIns="0" anchor="ctr">
+          <a:bodyPr wrap="none" lIns="18288" rIns="18288" tIns="18288" bIns="18288" anchor="t">
             <a:spAutoFit/>
           </a:bodyPr>
           <a:lstStyle/>
@@ -3441,781 +6362,13 @@
               </a:spcAft>
             </a:pPr>
             <a:r>
-              <a:rPr sz="1296" b="0" i="0">
+              <a:rPr sz="1000" b="0" i="0">
                 <a:solidFill>
-                  <a:srgbClr val="E7F0F3"/>
+                  <a:srgbClr val="B4C7D2"/>
                 </a:solidFill>
                 <a:latin typeface="Arial"/>
               </a:rPr>
-              <a:t>R</a:t>
-            </a:r>
-          </a:p>
-        </p:txBody>
-      </p:sp>
-      <p:cxnSp>
-        <p:nvCxnSpPr>
-          <p:cNvPr id="13" name="arrow 11" descr="sci-ppt:obj-011"/>
-          <p:cNvCxnSpPr/>
-          <p:nvPr/>
-        </p:nvCxnSpPr>
-        <p:spPr>
-          <a:xfrm>
-            <a:off x="5577840" y="1645920"/>
-            <a:ext cx="633355" cy="633355"/>
-          </a:xfrm>
-          <a:prstGeom prst="line">
-            <a:avLst/>
-          </a:prstGeom>
-          <a:ln w="21590">
-            <a:solidFill>
-              <a:srgbClr val="8EDBD4"/>
-            </a:solidFill>
-            <a:headEnd type="none" w="med" len="med"/>
-            <a:tailEnd type="triangle" w="med" len="med"/>
-          </a:ln>
-          <a:effectLst/>
-        </p:spPr>
-      </p:cxnSp>
-      <p:sp>
-        <p:nvSpPr>
-          <p:cNvPr id="14" name="text 12" descr="sci-ppt:obj-012"/>
-          <p:cNvSpPr txBox="1"/>
-          <p:nvPr/>
-        </p:nvSpPr>
-        <p:spPr>
-          <a:xfrm>
-            <a:off x="6373368" y="2231136"/>
-            <a:ext cx="640080" cy="310896"/>
-          </a:xfrm>
-          <a:prstGeom prst="rect">
-            <a:avLst/>
-          </a:prstGeom>
-          <a:noFill/>
-          <a:effectLst/>
-        </p:spPr>
-        <p:txBody>
-          <a:bodyPr wrap="none" lIns="0" rIns="0" tIns="0" bIns="0" anchor="ctr">
-            <a:spAutoFit/>
-          </a:bodyPr>
-          <a:lstStyle/>
-          <a:p>
-            <a:pPr algn="l">
-              <a:spcAft>
-                <a:spcPts val="0"/>
-              </a:spcAft>
-            </a:pPr>
-            <a:r>
-              <a:rPr sz="1296" b="0" i="0">
-                <a:solidFill>
-                  <a:srgbClr val="E7F0F3"/>
-                </a:solidFill>
-                <a:latin typeface="Arial"/>
-              </a:rPr>
-              <a:t>r</a:t>
-            </a:r>
-          </a:p>
-        </p:txBody>
-      </p:sp>
-      <p:cxnSp>
-        <p:nvCxnSpPr>
-          <p:cNvPr id="15" name="arrow 13" descr="sci-ppt:obj-013"/>
-          <p:cNvCxnSpPr/>
-          <p:nvPr/>
-        </p:nvCxnSpPr>
-        <p:spPr>
-          <a:xfrm>
-            <a:off x="2697480" y="1645920"/>
-            <a:ext cx="1691640" cy="0"/>
-          </a:xfrm>
-          <a:prstGeom prst="line">
-            <a:avLst/>
-          </a:prstGeom>
-          <a:ln w="21590">
-            <a:solidFill>
-              <a:srgbClr val="8EDBD4"/>
-            </a:solidFill>
-            <a:headEnd type="none" w="med" len="med"/>
-            <a:tailEnd type="triangle" w="med" len="med"/>
-          </a:ln>
-          <a:effectLst/>
-        </p:spPr>
-      </p:cxnSp>
-      <p:sp>
-        <p:nvSpPr>
-          <p:cNvPr id="16" name="text 14" descr="sci-ppt:obj-014"/>
-          <p:cNvSpPr txBox="1"/>
-          <p:nvPr/>
-        </p:nvSpPr>
-        <p:spPr>
-          <a:xfrm>
-            <a:off x="2834640" y="1143000"/>
-            <a:ext cx="2286000" cy="310896"/>
-          </a:xfrm>
-          <a:prstGeom prst="rect">
-            <a:avLst/>
-          </a:prstGeom>
-          <a:noFill/>
-          <a:effectLst/>
-        </p:spPr>
-        <p:txBody>
-          <a:bodyPr wrap="none" lIns="0" rIns="0" tIns="0" bIns="0" anchor="ctr">
-            <a:spAutoFit/>
-          </a:bodyPr>
-          <a:lstStyle/>
-          <a:p>
-            <a:pPr algn="l">
-              <a:spcAft>
-                <a:spcPts val="0"/>
-              </a:spcAft>
-            </a:pPr>
-            <a:r>
-              <a:rPr sz="1296" b="0" i="0">
-                <a:solidFill>
-                  <a:srgbClr val="E7F0F3"/>
-                </a:solidFill>
-                <a:latin typeface="Arial"/>
-              </a:rPr>
-              <a:t>Material map</a:t>
-            </a:r>
-          </a:p>
-        </p:txBody>
-      </p:sp>
-      <p:sp>
-        <p:nvSpPr>
-          <p:cNvPr id="17" name="text 15" descr="sci-ppt:obj-015"/>
-          <p:cNvSpPr txBox="1"/>
-          <p:nvPr/>
-        </p:nvSpPr>
-        <p:spPr>
-          <a:xfrm>
-            <a:off x="1005840" y="2578608"/>
-            <a:ext cx="2286000" cy="310896"/>
-          </a:xfrm>
-          <a:prstGeom prst="rect">
-            <a:avLst/>
-          </a:prstGeom>
-          <a:noFill/>
-          <a:effectLst/>
-        </p:spPr>
-        <p:txBody>
-          <a:bodyPr wrap="none" lIns="0" rIns="0" tIns="0" bIns="0" anchor="ctr">
-            <a:spAutoFit/>
-          </a:bodyPr>
-          <a:lstStyle/>
-          <a:p>
-            <a:pPr algn="l">
-              <a:spcAft>
-                <a:spcPts val="0"/>
-              </a:spcAft>
-            </a:pPr>
-            <a:r>
-              <a:rPr sz="1296" b="0" i="0">
-                <a:solidFill>
-                  <a:srgbClr val="E7F0F3"/>
-                </a:solidFill>
-                <a:latin typeface="Arial"/>
-              </a:rPr>
-              <a:t>Reference</a:t>
-            </a:r>
-          </a:p>
-        </p:txBody>
-      </p:sp>
-      <p:sp>
-        <p:nvSpPr>
-          <p:cNvPr id="18" name="text 16" descr="sci-ppt:obj-016"/>
-          <p:cNvSpPr txBox="1"/>
-          <p:nvPr/>
-        </p:nvSpPr>
-        <p:spPr>
-          <a:xfrm>
-            <a:off x="4846320" y="2660904"/>
-            <a:ext cx="3383280" cy="310896"/>
-          </a:xfrm>
-          <a:prstGeom prst="rect">
-            <a:avLst/>
-          </a:prstGeom>
-          <a:noFill/>
-          <a:effectLst/>
-        </p:spPr>
-        <p:txBody>
-          <a:bodyPr wrap="none" lIns="0" rIns="0" tIns="0" bIns="0" anchor="ctr">
-            <a:spAutoFit/>
-          </a:bodyPr>
-          <a:lstStyle/>
-          <a:p>
-            <a:pPr algn="l">
-              <a:spcAft>
-                <a:spcPts val="0"/>
-              </a:spcAft>
-            </a:pPr>
-            <a:r>
-              <a:rPr sz="1296" b="0" i="0">
-                <a:solidFill>
-                  <a:srgbClr val="E7F0F3"/>
-                </a:solidFill>
-                <a:latin typeface="Arial"/>
-              </a:rPr>
-              <a:t>Deformed: λr , λθ</a:t>
-            </a:r>
-          </a:p>
-        </p:txBody>
-      </p:sp>
-      <p:sp>
-        <p:nvSpPr>
-          <p:cNvPr id="19" name="text 17" descr="sci-ppt:obj-017"/>
-          <p:cNvSpPr txBox="1"/>
-          <p:nvPr/>
-        </p:nvSpPr>
-        <p:spPr>
-          <a:xfrm>
-            <a:off x="6839712" y="777240"/>
-            <a:ext cx="1645920" cy="310896"/>
-          </a:xfrm>
-          <a:prstGeom prst="rect">
-            <a:avLst/>
-          </a:prstGeom>
-          <a:noFill/>
-          <a:effectLst/>
-        </p:spPr>
-        <p:txBody>
-          <a:bodyPr wrap="none" lIns="0" rIns="0" tIns="0" bIns="0" anchor="ctr">
-            <a:spAutoFit/>
-          </a:bodyPr>
-          <a:lstStyle/>
-          <a:p>
-            <a:pPr algn="l">
-              <a:spcAft>
-                <a:spcPts val="0"/>
-              </a:spcAft>
-            </a:pPr>
-            <a:r>
-              <a:rPr sz="1296" b="0" i="0">
-                <a:solidFill>
-                  <a:srgbClr val="E7F0F3"/>
-                </a:solidFill>
-                <a:latin typeface="Arial"/>
-              </a:rPr>
-              <a:t>Gg , ηg</a:t>
-            </a:r>
-          </a:p>
-        </p:txBody>
-      </p:sp>
-      <p:sp>
-        <p:nvSpPr>
-          <p:cNvPr id="20" name="text 18" descr="sci-ppt:obj-018"/>
-          <p:cNvSpPr txBox="1"/>
-          <p:nvPr/>
-        </p:nvSpPr>
-        <p:spPr>
-          <a:xfrm>
-            <a:off x="6839712" y="1207008"/>
-            <a:ext cx="1828800" cy="310896"/>
-          </a:xfrm>
-          <a:prstGeom prst="rect">
-            <a:avLst/>
-          </a:prstGeom>
-          <a:noFill/>
-          <a:effectLst/>
-        </p:spPr>
-        <p:txBody>
-          <a:bodyPr wrap="none" lIns="0" rIns="0" tIns="0" bIns="0" anchor="ctr">
-            <a:spAutoFit/>
-          </a:bodyPr>
-          <a:lstStyle/>
-          <a:p>
-            <a:pPr algn="l">
-              <a:spcAft>
-                <a:spcPts val="0"/>
-              </a:spcAft>
-            </a:pPr>
-            <a:r>
-              <a:rPr sz="1296" b="0" i="0">
-                <a:solidFill>
-                  <a:srgbClr val="E7F0F3"/>
-                </a:solidFill>
-                <a:latin typeface="Arial"/>
-              </a:rPr>
-              <a:t>σrr , σθθ</a:t>
-            </a:r>
-          </a:p>
-        </p:txBody>
-      </p:sp>
-      <p:sp>
-        <p:nvSpPr>
-          <p:cNvPr id="21" name="text 19" descr="sci-ppt:obj-019"/>
-          <p:cNvSpPr txBox="1"/>
-          <p:nvPr/>
-        </p:nvSpPr>
-        <p:spPr>
-          <a:xfrm>
-            <a:off x="6839712" y="1645920"/>
-            <a:ext cx="1371600" cy="310896"/>
-          </a:xfrm>
-          <a:prstGeom prst="rect">
-            <a:avLst/>
-          </a:prstGeom>
-          <a:noFill/>
-          <a:effectLst/>
-        </p:spPr>
-        <p:txBody>
-          <a:bodyPr wrap="none" lIns="0" rIns="0" tIns="0" bIns="0" anchor="ctr">
-            <a:spAutoFit/>
-          </a:bodyPr>
-          <a:lstStyle/>
-          <a:p>
-            <a:pPr algn="l">
-              <a:spcAft>
-                <a:spcPts val="0"/>
-              </a:spcAft>
-            </a:pPr>
-            <a:r>
-              <a:rPr sz="1296" b="0" i="0">
-                <a:solidFill>
-                  <a:srgbClr val="E7F0F3"/>
-                </a:solidFill>
-                <a:latin typeface="Arial"/>
-              </a:rPr>
-              <a:t>p∞</a:t>
-            </a:r>
-          </a:p>
-        </p:txBody>
-      </p:sp>
-      <p:sp>
-        <p:nvSpPr>
-          <p:cNvPr id="22" name="text 20" descr="sci-ppt:obj-020"/>
-          <p:cNvSpPr txBox="1"/>
-          <p:nvPr/>
-        </p:nvSpPr>
-        <p:spPr>
-          <a:xfrm>
-            <a:off x="5266944" y="1682496"/>
-            <a:ext cx="822960" cy="310896"/>
-          </a:xfrm>
-          <a:prstGeom prst="rect">
-            <a:avLst/>
-          </a:prstGeom>
-          <a:noFill/>
-          <a:effectLst/>
-        </p:spPr>
-        <p:txBody>
-          <a:bodyPr wrap="none" lIns="0" rIns="0" tIns="0" bIns="0" anchor="ctr">
-            <a:spAutoFit/>
-          </a:bodyPr>
-          <a:lstStyle/>
-          <a:p>
-            <a:pPr algn="l">
-              <a:spcAft>
-                <a:spcPts val="0"/>
-              </a:spcAft>
-            </a:pPr>
-            <a:r>
-              <a:rPr sz="1296" b="0" i="0">
-                <a:solidFill>
-                  <a:srgbClr val="E7F0F3"/>
-                </a:solidFill>
-                <a:latin typeface="Arial"/>
-              </a:rPr>
-              <a:t>pb</a:t>
-            </a:r>
-          </a:p>
-        </p:txBody>
-      </p:sp>
-      <p:sp>
-        <p:nvSpPr>
-          <p:cNvPr id="23" name="text 21" descr="sci-ppt:obj-021"/>
-          <p:cNvSpPr txBox="1"/>
-          <p:nvPr/>
-        </p:nvSpPr>
-        <p:spPr>
-          <a:xfrm>
-            <a:off x="868680" y="2990088"/>
-            <a:ext cx="7772400" cy="310896"/>
-          </a:xfrm>
-          <a:prstGeom prst="rect">
-            <a:avLst/>
-          </a:prstGeom>
-          <a:noFill/>
-          <a:effectLst/>
-        </p:spPr>
-        <p:txBody>
-          <a:bodyPr wrap="none" lIns="0" rIns="0" tIns="0" bIns="0" anchor="ctr">
-            <a:spAutoFit/>
-          </a:bodyPr>
-          <a:lstStyle/>
-          <a:p>
-            <a:pPr algn="l">
-              <a:spcAft>
-                <a:spcPts val="0"/>
-              </a:spcAft>
-            </a:pPr>
-            <a:r>
-              <a:rPr sz="1152" b="0" i="0">
-                <a:solidFill>
-                  <a:srgbClr val="E7F0F3"/>
-                </a:solidFill>
-                <a:latin typeface="Arial"/>
-              </a:rPr>
-              <a:t>r₀³ − Rref³ = r³ − R³ ; radial coordinates point outward</a:t>
-            </a:r>
-          </a:p>
-        </p:txBody>
-      </p:sp>
-      <p:sp>
-        <p:nvSpPr>
-          <p:cNvPr id="24" name="text 22" descr="sci-ppt:obj-022"/>
-          <p:cNvSpPr txBox="1"/>
-          <p:nvPr/>
-        </p:nvSpPr>
-        <p:spPr>
-          <a:xfrm>
-            <a:off x="256032" y="3465576"/>
-            <a:ext cx="7315200" cy="310896"/>
-          </a:xfrm>
-          <a:prstGeom prst="rect">
-            <a:avLst/>
-          </a:prstGeom>
-          <a:noFill/>
-          <a:effectLst/>
-        </p:spPr>
-        <p:txBody>
-          <a:bodyPr wrap="none" lIns="0" rIns="0" tIns="0" bIns="0" anchor="ctr">
-            <a:spAutoFit/>
-          </a:bodyPr>
-          <a:lstStyle/>
-          <a:p>
-            <a:pPr algn="l">
-              <a:spcAft>
-                <a:spcPts val="0"/>
-              </a:spcAft>
-            </a:pPr>
-            <a:r>
-              <a:rPr sz="1296" b="0" i="0">
-                <a:solidFill>
-                  <a:srgbClr val="8EDBD4"/>
-                </a:solidFill>
-                <a:latin typeface="Arial"/>
-              </a:rPr>
-              <a:t>Variables and physical limits</a:t>
-            </a:r>
-          </a:p>
-        </p:txBody>
-      </p:sp>
-      <p:sp>
-        <p:nvSpPr>
-          <p:cNvPr id="25" name="text 23" descr="sci-ppt:obj-023"/>
-          <p:cNvSpPr txBox="1"/>
-          <p:nvPr/>
-        </p:nvSpPr>
-        <p:spPr>
-          <a:xfrm>
-            <a:off x="365760" y="3813048"/>
-            <a:ext cx="8412480" cy="310896"/>
-          </a:xfrm>
-          <a:prstGeom prst="rect">
-            <a:avLst/>
-          </a:prstGeom>
-          <a:noFill/>
-          <a:effectLst/>
-        </p:spPr>
-        <p:txBody>
-          <a:bodyPr wrap="none" lIns="0" rIns="0" tIns="0" bIns="0" anchor="ctr">
-            <a:spAutoFit/>
-          </a:bodyPr>
-          <a:lstStyle/>
-          <a:p>
-            <a:pPr algn="l">
-              <a:spcAft>
-                <a:spcPts val="0"/>
-              </a:spcAft>
-            </a:pPr>
-            <a:r>
-              <a:rPr sz="1152" b="0" i="0">
-                <a:solidFill>
-                  <a:srgbClr val="E7F0F3"/>
-                </a:solidFill>
-                <a:latin typeface="Arial"/>
-              </a:rPr>
-              <a:t>• R: cavity surface</a:t>
-            </a:r>
-          </a:p>
-        </p:txBody>
-      </p:sp>
-      <p:sp>
-        <p:nvSpPr>
-          <p:cNvPr id="26" name="text 24" descr="sci-ppt:obj-024"/>
-          <p:cNvSpPr txBox="1"/>
-          <p:nvPr/>
-        </p:nvSpPr>
-        <p:spPr>
-          <a:xfrm>
-            <a:off x="365760" y="4023360"/>
-            <a:ext cx="8412480" cy="310896"/>
-          </a:xfrm>
-          <a:prstGeom prst="rect">
-            <a:avLst/>
-          </a:prstGeom>
-          <a:noFill/>
-          <a:effectLst/>
-        </p:spPr>
-        <p:txBody>
-          <a:bodyPr wrap="none" lIns="0" rIns="0" tIns="0" bIns="0" anchor="ctr">
-            <a:spAutoFit/>
-          </a:bodyPr>
-          <a:lstStyle/>
-          <a:p>
-            <a:pPr algn="l">
-              <a:spcAft>
-                <a:spcPts val="0"/>
-              </a:spcAft>
-            </a:pPr>
-            <a:r>
-              <a:rPr sz="1152" b="0" i="0">
-                <a:solidFill>
-                  <a:srgbClr val="E7F0F3"/>
-                </a:solidFill>
-                <a:latin typeface="Arial"/>
-              </a:rPr>
-              <a:t>• pb: cavity pressure</a:t>
-            </a:r>
-          </a:p>
-        </p:txBody>
-      </p:sp>
-      <p:sp>
-        <p:nvSpPr>
-          <p:cNvPr id="27" name="text 25" descr="sci-ppt:obj-025"/>
-          <p:cNvSpPr txBox="1"/>
-          <p:nvPr/>
-        </p:nvSpPr>
-        <p:spPr>
-          <a:xfrm>
-            <a:off x="365760" y="4233672"/>
-            <a:ext cx="8412480" cy="310896"/>
-          </a:xfrm>
-          <a:prstGeom prst="rect">
-            <a:avLst/>
-          </a:prstGeom>
-          <a:noFill/>
-          <a:effectLst/>
-        </p:spPr>
-        <p:txBody>
-          <a:bodyPr wrap="none" lIns="0" rIns="0" tIns="0" bIns="0" anchor="ctr">
-            <a:spAutoFit/>
-          </a:bodyPr>
-          <a:lstStyle/>
-          <a:p>
-            <a:pPr algn="l">
-              <a:spcAft>
-                <a:spcPts val="0"/>
-              </a:spcAft>
-            </a:pPr>
-            <a:r>
-              <a:rPr sz="1152" b="0" i="0">
-                <a:solidFill>
-                  <a:srgbClr val="E7F0F3"/>
-                </a:solidFill>
-                <a:latin typeface="Arial"/>
-              </a:rPr>
-              <a:t>• 2σ/R: interface jump</a:t>
-            </a:r>
-          </a:p>
-        </p:txBody>
-      </p:sp>
-      <p:sp>
-        <p:nvSpPr>
-          <p:cNvPr id="28" name="text 26" descr="sci-ppt:obj-026"/>
-          <p:cNvSpPr txBox="1"/>
-          <p:nvPr/>
-        </p:nvSpPr>
-        <p:spPr>
-          <a:xfrm>
-            <a:off x="365760" y="4443984"/>
-            <a:ext cx="8412480" cy="310896"/>
-          </a:xfrm>
-          <a:prstGeom prst="rect">
-            <a:avLst/>
-          </a:prstGeom>
-          <a:noFill/>
-          <a:effectLst/>
-        </p:spPr>
-        <p:txBody>
-          <a:bodyPr wrap="none" lIns="0" rIns="0" tIns="0" bIns="0" anchor="ctr">
-            <a:spAutoFit/>
-          </a:bodyPr>
-          <a:lstStyle/>
-          <a:p>
-            <a:pPr algn="l">
-              <a:spcAft>
-                <a:spcPts val="0"/>
-              </a:spcAft>
-            </a:pPr>
-            <a:r>
-              <a:rPr sz="1152" b="0" i="0">
-                <a:solidFill>
-                  <a:srgbClr val="E7F0F3"/>
-                </a:solidFill>
-                <a:latin typeface="Arial"/>
-              </a:rPr>
-              <a:t>• p∞: far field</a:t>
-            </a:r>
-          </a:p>
-        </p:txBody>
-      </p:sp>
-      <p:sp>
-        <p:nvSpPr>
-          <p:cNvPr id="29" name="text 27" descr="sci-ppt:obj-027"/>
-          <p:cNvSpPr txBox="1"/>
-          <p:nvPr/>
-        </p:nvSpPr>
-        <p:spPr>
-          <a:xfrm>
-            <a:off x="365760" y="4654296"/>
-            <a:ext cx="8412480" cy="310896"/>
-          </a:xfrm>
-          <a:prstGeom prst="rect">
-            <a:avLst/>
-          </a:prstGeom>
-          <a:noFill/>
-          <a:effectLst/>
-        </p:spPr>
-        <p:txBody>
-          <a:bodyPr wrap="none" lIns="0" rIns="0" tIns="0" bIns="0" anchor="ctr">
-            <a:spAutoFit/>
-          </a:bodyPr>
-          <a:lstStyle/>
-          <a:p>
-            <a:pPr algn="l">
-              <a:spcAft>
-                <a:spcPts val="0"/>
-              </a:spcAft>
-            </a:pPr>
-            <a:r>
-              <a:rPr sz="1152" b="0" i="0">
-                <a:solidFill>
-                  <a:srgbClr val="E7F0F3"/>
-                </a:solidFill>
-                <a:latin typeface="Arial"/>
-              </a:rPr>
-              <a:t>• pel: integrated network resistance</a:t>
-            </a:r>
-          </a:p>
-        </p:txBody>
-      </p:sp>
-      <p:sp>
-        <p:nvSpPr>
-          <p:cNvPr id="30" name="text 28" descr="sci-ppt:obj-028"/>
-          <p:cNvSpPr txBox="1"/>
-          <p:nvPr/>
-        </p:nvSpPr>
-        <p:spPr>
-          <a:xfrm>
-            <a:off x="365760" y="4864608"/>
-            <a:ext cx="8412480" cy="310896"/>
-          </a:xfrm>
-          <a:prstGeom prst="rect">
-            <a:avLst/>
-          </a:prstGeom>
-          <a:noFill/>
-          <a:effectLst/>
-        </p:spPr>
-        <p:txBody>
-          <a:bodyPr wrap="none" lIns="0" rIns="0" tIns="0" bIns="0" anchor="ctr">
-            <a:spAutoFit/>
-          </a:bodyPr>
-          <a:lstStyle/>
-          <a:p>
-            <a:pPr algn="l">
-              <a:spcAft>
-                <a:spcPts val="0"/>
-              </a:spcAft>
-            </a:pPr>
-            <a:r>
-              <a:rPr sz="1152" b="0" i="0">
-                <a:solidFill>
-                  <a:srgbClr val="E7F0F3"/>
-                </a:solidFill>
-                <a:latin typeface="Arial"/>
-              </a:rPr>
-              <a:t>• r, r₀, Tᵉrr, Tᵉθθ, Gg</a:t>
-            </a:r>
-          </a:p>
-        </p:txBody>
-      </p:sp>
-      <p:sp>
-        <p:nvSpPr>
-          <p:cNvPr id="31" name="text 29" descr="sci-ppt:obj-029"/>
-          <p:cNvSpPr txBox="1"/>
-          <p:nvPr/>
-        </p:nvSpPr>
-        <p:spPr>
-          <a:xfrm>
-            <a:off x="365760" y="5074920"/>
-            <a:ext cx="8412480" cy="310896"/>
-          </a:xfrm>
-          <a:prstGeom prst="rect">
-            <a:avLst/>
-          </a:prstGeom>
-          <a:noFill/>
-          <a:effectLst/>
-        </p:spPr>
-        <p:txBody>
-          <a:bodyPr wrap="none" lIns="0" rIns="0" tIns="0" bIns="0" anchor="ctr">
-            <a:spAutoFit/>
-          </a:bodyPr>
-          <a:lstStyle/>
-          <a:p>
-            <a:pPr algn="l">
-              <a:spcAft>
-                <a:spcPts val="0"/>
-              </a:spcAft>
-            </a:pPr>
-            <a:r>
-              <a:rPr sz="1152" b="0" i="0">
-                <a:solidFill>
-                  <a:srgbClr val="E7F0F3"/>
-                </a:solidFill>
-                <a:latin typeface="Arial"/>
-              </a:rPr>
-              <a:t>Integrate from the wall to the far field</a:t>
-            </a:r>
-          </a:p>
-        </p:txBody>
-      </p:sp>
-      <p:sp>
-        <p:nvSpPr>
-          <p:cNvPr id="32" name="text 30" descr="sci-ppt:obj-030"/>
-          <p:cNvSpPr txBox="1"/>
-          <p:nvPr/>
-        </p:nvSpPr>
-        <p:spPr>
-          <a:xfrm>
-            <a:off x="365760" y="5285232"/>
-            <a:ext cx="8412480" cy="310896"/>
-          </a:xfrm>
-          <a:prstGeom prst="rect">
-            <a:avLst/>
-          </a:prstGeom>
-          <a:noFill/>
-          <a:effectLst/>
-        </p:spPr>
-        <p:txBody>
-          <a:bodyPr wrap="none" lIns="0" rIns="0" tIns="0" bIns="0" anchor="ctr">
-            <a:spAutoFit/>
-          </a:bodyPr>
-          <a:lstStyle/>
-          <a:p>
-            <a:pPr algn="l">
-              <a:spcAft>
-                <a:spcPts val="0"/>
-              </a:spcAft>
-            </a:pPr>
-            <a:r>
-              <a:rPr sz="1152" b="0" i="0">
-                <a:solidFill>
-                  <a:srgbClr val="E7F0F3"/>
-                </a:solidFill>
-                <a:latin typeface="Arial"/>
-              </a:rPr>
-              <a:t>Dynamic inertia is introduced later</a:t>
+              <a:t>Static balance of Eq. A-E03, integral evaluated numerically to 400R; closed form 43.326 kPa.</a:t>
             </a:r>
           </a:p>
         </p:txBody>
